--- a/Lectures/BlockCiphersLite.pptx
+++ b/Lectures/BlockCiphersLite.pptx
@@ -234,7 +234,7 @@
           <a:p>
             <a:fld id="{CBA08D16-15DC-4E25-BDC3-F25146157B16}" type="datetimeFigureOut">
               <a:rPr lang="ru-RU" smtClean="0"/>
-              <a:t>13.02.2025</a:t>
+              <a:t>20.02.2026</a:t>
             </a:fld>
             <a:endParaRPr lang="ru-RU"/>
           </a:p>
@@ -298,38 +298,37 @@
           <a:p>
             <a:pPr lvl="0"/>
             <a:r>
-              <a:rPr lang="ru-RU" smtClean="0"/>
+              <a:rPr lang="ru-RU"/>
               <a:t>Образец текста</a:t>
             </a:r>
           </a:p>
           <a:p>
             <a:pPr lvl="1"/>
             <a:r>
-              <a:rPr lang="ru-RU" smtClean="0"/>
+              <a:rPr lang="ru-RU"/>
               <a:t>Второй уровень</a:t>
             </a:r>
           </a:p>
           <a:p>
             <a:pPr lvl="2"/>
             <a:r>
-              <a:rPr lang="ru-RU" smtClean="0"/>
+              <a:rPr lang="ru-RU"/>
               <a:t>Третий уровень</a:t>
             </a:r>
           </a:p>
           <a:p>
             <a:pPr lvl="3"/>
             <a:r>
-              <a:rPr lang="ru-RU" smtClean="0"/>
+              <a:rPr lang="ru-RU"/>
               <a:t>Четвертый уровень</a:t>
             </a:r>
           </a:p>
           <a:p>
             <a:pPr lvl="4"/>
             <a:r>
-              <a:rPr lang="ru-RU" smtClean="0"/>
+              <a:rPr lang="ru-RU"/>
               <a:t>Пятый уровень</a:t>
             </a:r>
-            <a:endParaRPr lang="ru-RU"/>
           </a:p>
         </p:txBody>
       </p:sp>
@@ -544,10 +543,9 @@
           </a:lstStyle>
           <a:p>
             <a:r>
-              <a:rPr lang="ru-RU" smtClean="0"/>
+              <a:rPr lang="ru-RU"/>
               <a:t>Образец заголовка</a:t>
             </a:r>
-            <a:endParaRPr lang="ru-RU"/>
           </a:p>
         </p:txBody>
       </p:sp>
@@ -609,10 +607,9 @@
           </a:lstStyle>
           <a:p>
             <a:r>
-              <a:rPr lang="ru-RU" smtClean="0"/>
+              <a:rPr lang="ru-RU"/>
               <a:t>Образец подзаголовка</a:t>
             </a:r>
-            <a:endParaRPr lang="ru-RU"/>
           </a:p>
         </p:txBody>
       </p:sp>
@@ -633,7 +630,7 @@
           <a:p>
             <a:fld id="{FCEC8293-DB51-454A-BE81-EC8FCB31EBA2}" type="datetime1">
               <a:rPr lang="ru-RU" smtClean="0"/>
-              <a:t>13.02.2025</a:t>
+              <a:t>20.02.2026</a:t>
             </a:fld>
             <a:endParaRPr lang="ru-RU"/>
           </a:p>
@@ -655,10 +652,9 @@
           <a:lstStyle/>
           <a:p>
             <a:r>
-              <a:rPr lang="ru-RU" smtClean="0"/>
+              <a:rPr lang="ru-RU"/>
               <a:t>Артём Макаров</a:t>
             </a:r>
-            <a:endParaRPr lang="ru-RU"/>
           </a:p>
         </p:txBody>
       </p:sp>
@@ -731,10 +727,9 @@
           <a:lstStyle/>
           <a:p>
             <a:r>
-              <a:rPr lang="ru-RU" smtClean="0"/>
+              <a:rPr lang="ru-RU"/>
               <a:t>Образец заголовка</a:t>
             </a:r>
-            <a:endParaRPr lang="ru-RU"/>
           </a:p>
         </p:txBody>
       </p:sp>
@@ -755,38 +750,37 @@
           <a:p>
             <a:pPr lvl="0"/>
             <a:r>
-              <a:rPr lang="ru-RU" smtClean="0"/>
+              <a:rPr lang="ru-RU"/>
               <a:t>Образец текста</a:t>
             </a:r>
           </a:p>
           <a:p>
             <a:pPr lvl="1"/>
             <a:r>
-              <a:rPr lang="ru-RU" smtClean="0"/>
+              <a:rPr lang="ru-RU"/>
               <a:t>Второй уровень</a:t>
             </a:r>
           </a:p>
           <a:p>
             <a:pPr lvl="2"/>
             <a:r>
-              <a:rPr lang="ru-RU" smtClean="0"/>
+              <a:rPr lang="ru-RU"/>
               <a:t>Третий уровень</a:t>
             </a:r>
           </a:p>
           <a:p>
             <a:pPr lvl="3"/>
             <a:r>
-              <a:rPr lang="ru-RU" smtClean="0"/>
+              <a:rPr lang="ru-RU"/>
               <a:t>Четвертый уровень</a:t>
             </a:r>
           </a:p>
           <a:p>
             <a:pPr lvl="4"/>
             <a:r>
-              <a:rPr lang="ru-RU" smtClean="0"/>
+              <a:rPr lang="ru-RU"/>
               <a:t>Пятый уровень</a:t>
             </a:r>
-            <a:endParaRPr lang="ru-RU"/>
           </a:p>
         </p:txBody>
       </p:sp>
@@ -807,7 +801,7 @@
           <a:p>
             <a:fld id="{241C87B1-1C35-4DBD-BC18-2BC72E776603}" type="datetime1">
               <a:rPr lang="ru-RU" smtClean="0"/>
-              <a:t>13.02.2025</a:t>
+              <a:t>20.02.2026</a:t>
             </a:fld>
             <a:endParaRPr lang="ru-RU"/>
           </a:p>
@@ -829,10 +823,9 @@
           <a:lstStyle/>
           <a:p>
             <a:r>
-              <a:rPr lang="ru-RU" smtClean="0"/>
+              <a:rPr lang="ru-RU"/>
               <a:t>Артём Макаров</a:t>
             </a:r>
-            <a:endParaRPr lang="ru-RU"/>
           </a:p>
         </p:txBody>
       </p:sp>
@@ -910,10 +903,9 @@
           <a:lstStyle/>
           <a:p>
             <a:r>
-              <a:rPr lang="ru-RU" smtClean="0"/>
+              <a:rPr lang="ru-RU"/>
               <a:t>Образец заголовка</a:t>
             </a:r>
-            <a:endParaRPr lang="ru-RU"/>
           </a:p>
         </p:txBody>
       </p:sp>
@@ -939,38 +931,37 @@
           <a:p>
             <a:pPr lvl="0"/>
             <a:r>
-              <a:rPr lang="ru-RU" smtClean="0"/>
+              <a:rPr lang="ru-RU"/>
               <a:t>Образец текста</a:t>
             </a:r>
           </a:p>
           <a:p>
             <a:pPr lvl="1"/>
             <a:r>
-              <a:rPr lang="ru-RU" smtClean="0"/>
+              <a:rPr lang="ru-RU"/>
               <a:t>Второй уровень</a:t>
             </a:r>
           </a:p>
           <a:p>
             <a:pPr lvl="2"/>
             <a:r>
-              <a:rPr lang="ru-RU" smtClean="0"/>
+              <a:rPr lang="ru-RU"/>
               <a:t>Третий уровень</a:t>
             </a:r>
           </a:p>
           <a:p>
             <a:pPr lvl="3"/>
             <a:r>
-              <a:rPr lang="ru-RU" smtClean="0"/>
+              <a:rPr lang="ru-RU"/>
               <a:t>Четвертый уровень</a:t>
             </a:r>
           </a:p>
           <a:p>
             <a:pPr lvl="4"/>
             <a:r>
-              <a:rPr lang="ru-RU" smtClean="0"/>
+              <a:rPr lang="ru-RU"/>
               <a:t>Пятый уровень</a:t>
             </a:r>
-            <a:endParaRPr lang="ru-RU"/>
           </a:p>
         </p:txBody>
       </p:sp>
@@ -991,7 +982,7 @@
           <a:p>
             <a:fld id="{3134C275-26C0-42CD-9111-9ADE65922AF9}" type="datetime1">
               <a:rPr lang="ru-RU" smtClean="0"/>
-              <a:t>13.02.2025</a:t>
+              <a:t>20.02.2026</a:t>
             </a:fld>
             <a:endParaRPr lang="ru-RU"/>
           </a:p>
@@ -1013,10 +1004,9 @@
           <a:lstStyle/>
           <a:p>
             <a:r>
-              <a:rPr lang="ru-RU" smtClean="0"/>
+              <a:rPr lang="ru-RU"/>
               <a:t>Артём Макаров</a:t>
             </a:r>
-            <a:endParaRPr lang="ru-RU"/>
           </a:p>
         </p:txBody>
       </p:sp>
@@ -1089,10 +1079,9 @@
           <a:lstStyle/>
           <a:p>
             <a:r>
-              <a:rPr lang="ru-RU" smtClean="0"/>
+              <a:rPr lang="ru-RU"/>
               <a:t>Образец заголовка</a:t>
             </a:r>
-            <a:endParaRPr lang="ru-RU"/>
           </a:p>
         </p:txBody>
       </p:sp>
@@ -1113,38 +1102,37 @@
           <a:p>
             <a:pPr lvl="0"/>
             <a:r>
-              <a:rPr lang="ru-RU" dirty="0" smtClean="0"/>
+              <a:rPr lang="ru-RU" dirty="0"/>
               <a:t>Образец текста</a:t>
             </a:r>
           </a:p>
           <a:p>
             <a:pPr lvl="1"/>
             <a:r>
-              <a:rPr lang="ru-RU" dirty="0" smtClean="0"/>
+              <a:rPr lang="ru-RU" dirty="0"/>
               <a:t>Второй уровень</a:t>
             </a:r>
           </a:p>
           <a:p>
             <a:pPr lvl="2"/>
             <a:r>
-              <a:rPr lang="ru-RU" dirty="0" smtClean="0"/>
+              <a:rPr lang="ru-RU" dirty="0"/>
               <a:t>Третий уровень</a:t>
             </a:r>
           </a:p>
           <a:p>
             <a:pPr lvl="3"/>
             <a:r>
-              <a:rPr lang="ru-RU" dirty="0" smtClean="0"/>
+              <a:rPr lang="ru-RU" dirty="0"/>
               <a:t>Четвертый уровень</a:t>
             </a:r>
           </a:p>
           <a:p>
             <a:pPr lvl="4"/>
             <a:r>
-              <a:rPr lang="ru-RU" dirty="0" smtClean="0"/>
+              <a:rPr lang="ru-RU" dirty="0"/>
               <a:t>Пятый уровень</a:t>
             </a:r>
-            <a:endParaRPr lang="ru-RU" dirty="0"/>
           </a:p>
         </p:txBody>
       </p:sp>
@@ -1165,7 +1153,7 @@
           <a:p>
             <a:fld id="{C1A9A50B-C350-45F5-8AAB-ADB9E670AF2E}" type="datetime1">
               <a:rPr lang="ru-RU" smtClean="0"/>
-              <a:t>13.02.2025</a:t>
+              <a:t>20.02.2026</a:t>
             </a:fld>
             <a:endParaRPr lang="ru-RU"/>
           </a:p>
@@ -1187,10 +1175,9 @@
           <a:lstStyle/>
           <a:p>
             <a:r>
-              <a:rPr lang="ru-RU" smtClean="0"/>
+              <a:rPr lang="ru-RU"/>
               <a:t>Артём Макаров</a:t>
             </a:r>
-            <a:endParaRPr lang="ru-RU"/>
           </a:p>
         </p:txBody>
       </p:sp>
@@ -1272,10 +1259,9 @@
           </a:lstStyle>
           <a:p>
             <a:r>
-              <a:rPr lang="ru-RU" smtClean="0"/>
+              <a:rPr lang="ru-RU"/>
               <a:t>Образец заголовка</a:t>
             </a:r>
-            <a:endParaRPr lang="ru-RU"/>
           </a:p>
         </p:txBody>
       </p:sp>
@@ -1392,7 +1378,7 @@
           <a:p>
             <a:pPr lvl="0"/>
             <a:r>
-              <a:rPr lang="ru-RU" smtClean="0"/>
+              <a:rPr lang="ru-RU"/>
               <a:t>Образец текста</a:t>
             </a:r>
           </a:p>
@@ -1415,7 +1401,7 @@
           <a:p>
             <a:fld id="{089688C9-348F-42F9-B6C0-5990DDE0C5B2}" type="datetime1">
               <a:rPr lang="ru-RU" smtClean="0"/>
-              <a:t>13.02.2025</a:t>
+              <a:t>20.02.2026</a:t>
             </a:fld>
             <a:endParaRPr lang="ru-RU"/>
           </a:p>
@@ -1437,10 +1423,9 @@
           <a:lstStyle/>
           <a:p>
             <a:r>
-              <a:rPr lang="ru-RU" smtClean="0"/>
+              <a:rPr lang="ru-RU"/>
               <a:t>Артём Макаров</a:t>
             </a:r>
-            <a:endParaRPr lang="ru-RU"/>
           </a:p>
         </p:txBody>
       </p:sp>
@@ -1513,10 +1498,9 @@
           <a:lstStyle/>
           <a:p>
             <a:r>
-              <a:rPr lang="ru-RU" smtClean="0"/>
+              <a:rPr lang="ru-RU"/>
               <a:t>Образец заголовка</a:t>
             </a:r>
-            <a:endParaRPr lang="ru-RU"/>
           </a:p>
         </p:txBody>
       </p:sp>
@@ -1542,38 +1526,37 @@
           <a:p>
             <a:pPr lvl="0"/>
             <a:r>
-              <a:rPr lang="ru-RU" smtClean="0"/>
+              <a:rPr lang="ru-RU"/>
               <a:t>Образец текста</a:t>
             </a:r>
           </a:p>
           <a:p>
             <a:pPr lvl="1"/>
             <a:r>
-              <a:rPr lang="ru-RU" smtClean="0"/>
+              <a:rPr lang="ru-RU"/>
               <a:t>Второй уровень</a:t>
             </a:r>
           </a:p>
           <a:p>
             <a:pPr lvl="2"/>
             <a:r>
-              <a:rPr lang="ru-RU" smtClean="0"/>
+              <a:rPr lang="ru-RU"/>
               <a:t>Третий уровень</a:t>
             </a:r>
           </a:p>
           <a:p>
             <a:pPr lvl="3"/>
             <a:r>
-              <a:rPr lang="ru-RU" smtClean="0"/>
+              <a:rPr lang="ru-RU"/>
               <a:t>Четвертый уровень</a:t>
             </a:r>
           </a:p>
           <a:p>
             <a:pPr lvl="4"/>
             <a:r>
-              <a:rPr lang="ru-RU" smtClean="0"/>
+              <a:rPr lang="ru-RU"/>
               <a:t>Пятый уровень</a:t>
             </a:r>
-            <a:endParaRPr lang="ru-RU"/>
           </a:p>
         </p:txBody>
       </p:sp>
@@ -1599,38 +1582,37 @@
           <a:p>
             <a:pPr lvl="0"/>
             <a:r>
-              <a:rPr lang="ru-RU" smtClean="0"/>
+              <a:rPr lang="ru-RU"/>
               <a:t>Образец текста</a:t>
             </a:r>
           </a:p>
           <a:p>
             <a:pPr lvl="1"/>
             <a:r>
-              <a:rPr lang="ru-RU" smtClean="0"/>
+              <a:rPr lang="ru-RU"/>
               <a:t>Второй уровень</a:t>
             </a:r>
           </a:p>
           <a:p>
             <a:pPr lvl="2"/>
             <a:r>
-              <a:rPr lang="ru-RU" smtClean="0"/>
+              <a:rPr lang="ru-RU"/>
               <a:t>Третий уровень</a:t>
             </a:r>
           </a:p>
           <a:p>
             <a:pPr lvl="3"/>
             <a:r>
-              <a:rPr lang="ru-RU" smtClean="0"/>
+              <a:rPr lang="ru-RU"/>
               <a:t>Четвертый уровень</a:t>
             </a:r>
           </a:p>
           <a:p>
             <a:pPr lvl="4"/>
             <a:r>
-              <a:rPr lang="ru-RU" smtClean="0"/>
+              <a:rPr lang="ru-RU"/>
               <a:t>Пятый уровень</a:t>
             </a:r>
-            <a:endParaRPr lang="ru-RU"/>
           </a:p>
         </p:txBody>
       </p:sp>
@@ -1651,7 +1633,7 @@
           <a:p>
             <a:fld id="{684AFD8F-6DD9-4AD3-A505-FDC3F5C5F3F6}" type="datetime1">
               <a:rPr lang="ru-RU" smtClean="0"/>
-              <a:t>13.02.2025</a:t>
+              <a:t>20.02.2026</a:t>
             </a:fld>
             <a:endParaRPr lang="ru-RU"/>
           </a:p>
@@ -1673,10 +1655,9 @@
           <a:lstStyle/>
           <a:p>
             <a:r>
-              <a:rPr lang="ru-RU" smtClean="0"/>
+              <a:rPr lang="ru-RU"/>
               <a:t>Артём Макаров</a:t>
             </a:r>
-            <a:endParaRPr lang="ru-RU"/>
           </a:p>
         </p:txBody>
       </p:sp>
@@ -1754,10 +1735,9 @@
           <a:lstStyle/>
           <a:p>
             <a:r>
-              <a:rPr lang="ru-RU" smtClean="0"/>
+              <a:rPr lang="ru-RU"/>
               <a:t>Образец заголовка</a:t>
             </a:r>
-            <a:endParaRPr lang="ru-RU"/>
           </a:p>
         </p:txBody>
       </p:sp>
@@ -1820,7 +1800,7 @@
           <a:p>
             <a:pPr lvl="0"/>
             <a:r>
-              <a:rPr lang="ru-RU" dirty="0" smtClean="0"/>
+              <a:rPr lang="ru-RU" dirty="0"/>
               <a:t>Образец текста</a:t>
             </a:r>
           </a:p>
@@ -1848,38 +1828,37 @@
           <a:p>
             <a:pPr lvl="0"/>
             <a:r>
-              <a:rPr lang="ru-RU" dirty="0" smtClean="0"/>
+              <a:rPr lang="ru-RU" dirty="0"/>
               <a:t>Образец текста</a:t>
             </a:r>
           </a:p>
           <a:p>
             <a:pPr lvl="1"/>
             <a:r>
-              <a:rPr lang="ru-RU" dirty="0" smtClean="0"/>
+              <a:rPr lang="ru-RU" dirty="0"/>
               <a:t>Второй уровень</a:t>
             </a:r>
           </a:p>
           <a:p>
             <a:pPr lvl="2"/>
             <a:r>
-              <a:rPr lang="ru-RU" dirty="0" smtClean="0"/>
+              <a:rPr lang="ru-RU" dirty="0"/>
               <a:t>Третий уровень</a:t>
             </a:r>
           </a:p>
           <a:p>
             <a:pPr lvl="3"/>
             <a:r>
-              <a:rPr lang="ru-RU" dirty="0" smtClean="0"/>
+              <a:rPr lang="ru-RU" dirty="0"/>
               <a:t>Четвертый уровень</a:t>
             </a:r>
           </a:p>
           <a:p>
             <a:pPr lvl="4"/>
             <a:r>
-              <a:rPr lang="ru-RU" dirty="0" smtClean="0"/>
+              <a:rPr lang="ru-RU" dirty="0"/>
               <a:t>Пятый уровень</a:t>
             </a:r>
-            <a:endParaRPr lang="ru-RU" dirty="0"/>
           </a:p>
         </p:txBody>
       </p:sp>
@@ -1942,7 +1921,7 @@
           <a:p>
             <a:pPr lvl="0"/>
             <a:r>
-              <a:rPr lang="ru-RU" smtClean="0"/>
+              <a:rPr lang="ru-RU"/>
               <a:t>Образец текста</a:t>
             </a:r>
           </a:p>
@@ -1970,38 +1949,37 @@
           <a:p>
             <a:pPr lvl="0"/>
             <a:r>
-              <a:rPr lang="ru-RU" smtClean="0"/>
+              <a:rPr lang="ru-RU"/>
               <a:t>Образец текста</a:t>
             </a:r>
           </a:p>
           <a:p>
             <a:pPr lvl="1"/>
             <a:r>
-              <a:rPr lang="ru-RU" smtClean="0"/>
+              <a:rPr lang="ru-RU"/>
               <a:t>Второй уровень</a:t>
             </a:r>
           </a:p>
           <a:p>
             <a:pPr lvl="2"/>
             <a:r>
-              <a:rPr lang="ru-RU" smtClean="0"/>
+              <a:rPr lang="ru-RU"/>
               <a:t>Третий уровень</a:t>
             </a:r>
           </a:p>
           <a:p>
             <a:pPr lvl="3"/>
             <a:r>
-              <a:rPr lang="ru-RU" smtClean="0"/>
+              <a:rPr lang="ru-RU"/>
               <a:t>Четвертый уровень</a:t>
             </a:r>
           </a:p>
           <a:p>
             <a:pPr lvl="4"/>
             <a:r>
-              <a:rPr lang="ru-RU" smtClean="0"/>
+              <a:rPr lang="ru-RU"/>
               <a:t>Пятый уровень</a:t>
             </a:r>
-            <a:endParaRPr lang="ru-RU"/>
           </a:p>
         </p:txBody>
       </p:sp>
@@ -2022,7 +2000,7 @@
           <a:p>
             <a:fld id="{63551EFE-4D02-45EB-A747-8B6F047B5AA0}" type="datetime1">
               <a:rPr lang="ru-RU" smtClean="0"/>
-              <a:t>13.02.2025</a:t>
+              <a:t>20.02.2026</a:t>
             </a:fld>
             <a:endParaRPr lang="ru-RU"/>
           </a:p>
@@ -2044,10 +2022,9 @@
           <a:lstStyle/>
           <a:p>
             <a:r>
-              <a:rPr lang="ru-RU" smtClean="0"/>
+              <a:rPr lang="ru-RU"/>
               <a:t>Артём Макаров</a:t>
             </a:r>
-            <a:endParaRPr lang="ru-RU"/>
           </a:p>
         </p:txBody>
       </p:sp>
@@ -2120,10 +2097,9 @@
           <a:lstStyle/>
           <a:p>
             <a:r>
-              <a:rPr lang="ru-RU" smtClean="0"/>
+              <a:rPr lang="ru-RU"/>
               <a:t>Образец заголовка</a:t>
             </a:r>
-            <a:endParaRPr lang="ru-RU"/>
           </a:p>
         </p:txBody>
       </p:sp>
@@ -2144,7 +2120,7 @@
           <a:p>
             <a:fld id="{813A9F34-E5CD-4B8F-AA9E-889C84372B20}" type="datetime1">
               <a:rPr lang="ru-RU" smtClean="0"/>
-              <a:t>13.02.2025</a:t>
+              <a:t>20.02.2026</a:t>
             </a:fld>
             <a:endParaRPr lang="ru-RU"/>
           </a:p>
@@ -2166,10 +2142,9 @@
           <a:lstStyle/>
           <a:p>
             <a:r>
-              <a:rPr lang="ru-RU" smtClean="0"/>
+              <a:rPr lang="ru-RU"/>
               <a:t>Артём Макаров</a:t>
             </a:r>
-            <a:endParaRPr lang="ru-RU"/>
           </a:p>
         </p:txBody>
       </p:sp>
@@ -2243,7 +2218,7 @@
           <a:p>
             <a:fld id="{51224D22-9B29-44A6-8E82-95FC492DEDC1}" type="datetime1">
               <a:rPr lang="ru-RU" smtClean="0"/>
-              <a:t>13.02.2025</a:t>
+              <a:t>20.02.2026</a:t>
             </a:fld>
             <a:endParaRPr lang="ru-RU"/>
           </a:p>
@@ -2265,10 +2240,9 @@
           <a:lstStyle/>
           <a:p>
             <a:r>
-              <a:rPr lang="ru-RU" smtClean="0"/>
+              <a:rPr lang="ru-RU"/>
               <a:t>Артём Макаров</a:t>
             </a:r>
-            <a:endParaRPr lang="ru-RU"/>
           </a:p>
         </p:txBody>
       </p:sp>
@@ -2350,10 +2324,9 @@
           </a:lstStyle>
           <a:p>
             <a:r>
-              <a:rPr lang="ru-RU" smtClean="0"/>
+              <a:rPr lang="ru-RU"/>
               <a:t>Образец заголовка</a:t>
             </a:r>
-            <a:endParaRPr lang="ru-RU"/>
           </a:p>
         </p:txBody>
       </p:sp>
@@ -2407,38 +2380,37 @@
           <a:p>
             <a:pPr lvl="0"/>
             <a:r>
-              <a:rPr lang="ru-RU" smtClean="0"/>
+              <a:rPr lang="ru-RU"/>
               <a:t>Образец текста</a:t>
             </a:r>
           </a:p>
           <a:p>
             <a:pPr lvl="1"/>
             <a:r>
-              <a:rPr lang="ru-RU" smtClean="0"/>
+              <a:rPr lang="ru-RU"/>
               <a:t>Второй уровень</a:t>
             </a:r>
           </a:p>
           <a:p>
             <a:pPr lvl="2"/>
             <a:r>
-              <a:rPr lang="ru-RU" smtClean="0"/>
+              <a:rPr lang="ru-RU"/>
               <a:t>Третий уровень</a:t>
             </a:r>
           </a:p>
           <a:p>
             <a:pPr lvl="3"/>
             <a:r>
-              <a:rPr lang="ru-RU" smtClean="0"/>
+              <a:rPr lang="ru-RU"/>
               <a:t>Четвертый уровень</a:t>
             </a:r>
           </a:p>
           <a:p>
             <a:pPr lvl="4"/>
             <a:r>
-              <a:rPr lang="ru-RU" smtClean="0"/>
+              <a:rPr lang="ru-RU"/>
               <a:t>Пятый уровень</a:t>
             </a:r>
-            <a:endParaRPr lang="ru-RU"/>
           </a:p>
         </p:txBody>
       </p:sp>
@@ -2501,7 +2473,7 @@
           <a:p>
             <a:pPr lvl="0"/>
             <a:r>
-              <a:rPr lang="ru-RU" smtClean="0"/>
+              <a:rPr lang="ru-RU"/>
               <a:t>Образец текста</a:t>
             </a:r>
           </a:p>
@@ -2524,7 +2496,7 @@
           <a:p>
             <a:fld id="{91D1034F-4441-48A1-BDC0-25EA1022324A}" type="datetime1">
               <a:rPr lang="ru-RU" smtClean="0"/>
-              <a:t>13.02.2025</a:t>
+              <a:t>20.02.2026</a:t>
             </a:fld>
             <a:endParaRPr lang="ru-RU"/>
           </a:p>
@@ -2546,10 +2518,9 @@
           <a:lstStyle/>
           <a:p>
             <a:r>
-              <a:rPr lang="ru-RU" smtClean="0"/>
+              <a:rPr lang="ru-RU"/>
               <a:t>Артём Макаров</a:t>
             </a:r>
-            <a:endParaRPr lang="ru-RU"/>
           </a:p>
         </p:txBody>
       </p:sp>
@@ -2631,10 +2602,9 @@
           </a:lstStyle>
           <a:p>
             <a:r>
-              <a:rPr lang="ru-RU" smtClean="0"/>
+              <a:rPr lang="ru-RU"/>
               <a:t>Образец заголовка</a:t>
             </a:r>
-            <a:endParaRPr lang="ru-RU"/>
           </a:p>
         </p:txBody>
       </p:sp>
@@ -2758,7 +2728,7 @@
           <a:p>
             <a:pPr lvl="0"/>
             <a:r>
-              <a:rPr lang="ru-RU" smtClean="0"/>
+              <a:rPr lang="ru-RU"/>
               <a:t>Образец текста</a:t>
             </a:r>
           </a:p>
@@ -2781,7 +2751,7 @@
           <a:p>
             <a:fld id="{B0FFDE79-B627-473B-AE17-4C65BD2495F7}" type="datetime1">
               <a:rPr lang="ru-RU" smtClean="0"/>
-              <a:t>13.02.2025</a:t>
+              <a:t>20.02.2026</a:t>
             </a:fld>
             <a:endParaRPr lang="ru-RU"/>
           </a:p>
@@ -2803,10 +2773,9 @@
           <a:lstStyle/>
           <a:p>
             <a:r>
-              <a:rPr lang="ru-RU" smtClean="0"/>
+              <a:rPr lang="ru-RU"/>
               <a:t>Артём Макаров</a:t>
             </a:r>
-            <a:endParaRPr lang="ru-RU"/>
           </a:p>
         </p:txBody>
       </p:sp>
@@ -2894,10 +2863,9 @@
           <a:lstStyle/>
           <a:p>
             <a:r>
-              <a:rPr lang="ru-RU" dirty="0" smtClean="0"/>
+              <a:rPr lang="ru-RU" dirty="0"/>
               <a:t>Образец заголовка</a:t>
             </a:r>
-            <a:endParaRPr lang="ru-RU" dirty="0"/>
           </a:p>
         </p:txBody>
       </p:sp>
@@ -2928,38 +2896,37 @@
           <a:p>
             <a:pPr lvl="0"/>
             <a:r>
-              <a:rPr lang="ru-RU" dirty="0" smtClean="0"/>
+              <a:rPr lang="ru-RU" dirty="0"/>
               <a:t>Образец текста</a:t>
             </a:r>
           </a:p>
           <a:p>
             <a:pPr lvl="1"/>
             <a:r>
-              <a:rPr lang="ru-RU" dirty="0" smtClean="0"/>
+              <a:rPr lang="ru-RU" dirty="0"/>
               <a:t>Второй уровень</a:t>
             </a:r>
           </a:p>
           <a:p>
             <a:pPr lvl="2"/>
             <a:r>
-              <a:rPr lang="ru-RU" dirty="0" smtClean="0"/>
+              <a:rPr lang="ru-RU" dirty="0"/>
               <a:t>Третий уровень</a:t>
             </a:r>
           </a:p>
           <a:p>
             <a:pPr lvl="3"/>
             <a:r>
-              <a:rPr lang="ru-RU" dirty="0" smtClean="0"/>
+              <a:rPr lang="ru-RU" dirty="0"/>
               <a:t>Четвертый уровень</a:t>
             </a:r>
           </a:p>
           <a:p>
             <a:pPr lvl="4"/>
             <a:r>
-              <a:rPr lang="ru-RU" dirty="0" smtClean="0"/>
+              <a:rPr lang="ru-RU" dirty="0"/>
               <a:t>Пятый уровень</a:t>
             </a:r>
-            <a:endParaRPr lang="ru-RU" dirty="0"/>
           </a:p>
         </p:txBody>
       </p:sp>
@@ -2998,7 +2965,7 @@
           <a:p>
             <a:fld id="{11CA537A-1B8C-47BA-9BA6-7CE3FAFDA8BE}" type="datetime1">
               <a:rPr lang="ru-RU" smtClean="0"/>
-              <a:t>13.02.2025</a:t>
+              <a:t>20.02.2026</a:t>
             </a:fld>
             <a:endParaRPr lang="ru-RU"/>
           </a:p>
@@ -3038,10 +3005,9 @@
           </a:lstStyle>
           <a:p>
             <a:r>
-              <a:rPr lang="ru-RU" smtClean="0"/>
+              <a:rPr lang="ru-RU"/>
               <a:t>Артём Макаров</a:t>
             </a:r>
-            <a:endParaRPr lang="ru-RU"/>
           </a:p>
         </p:txBody>
       </p:sp>
@@ -3426,18 +3392,9 @@
           <a:lstStyle/>
           <a:p>
             <a:r>
-              <a:rPr lang="ru-RU" dirty="0" smtClean="0"/>
-              <a:t>Поточные и </a:t>
-            </a:r>
-            <a:r>
               <a:rPr lang="ru-RU" dirty="0"/>
-              <a:t>Б</a:t>
-            </a:r>
-            <a:r>
-              <a:rPr lang="ru-RU" dirty="0" smtClean="0"/>
-              <a:t>лочные шифры</a:t>
-            </a:r>
-            <a:endParaRPr lang="ru-RU" dirty="0"/>
+              <a:t>Поточные и Блочные шифры</a:t>
+            </a:r>
           </a:p>
         </p:txBody>
       </p:sp>
@@ -3462,18 +3419,18 @@
           <a:lstStyle/>
           <a:p>
             <a:r>
-              <a:rPr lang="ru-RU" dirty="0" smtClean="0"/>
+              <a:rPr lang="ru-RU" dirty="0"/>
               <a:t>Макаров Артём </a:t>
             </a:r>
           </a:p>
           <a:p>
             <a:r>
-              <a:rPr lang="ru-RU" dirty="0" smtClean="0"/>
-              <a:t>МИФИ </a:t>
-            </a:r>
-            <a:r>
-              <a:rPr lang="ru-RU" dirty="0" smtClean="0"/>
-              <a:t>2025</a:t>
+              <a:rPr lang="ru-RU" dirty="0"/>
+              <a:t>МИФИ 202</a:t>
+            </a:r>
+            <a:r>
+              <a:rPr lang="en-US" dirty="0"/>
+              <a:t>6</a:t>
             </a:r>
             <a:endParaRPr lang="ru-RU" dirty="0"/>
           </a:p>
@@ -3489,13 +3446,6 @@
   <p:clrMapOvr>
     <a:masterClrMapping/>
   </p:clrMapOvr>
-  <p:timing>
-    <p:tnLst>
-      <p:par>
-        <p:cTn id="1" dur="indefinite" restart="never" nodeType="tmRoot"/>
-      </p:par>
-    </p:tnLst>
-  </p:timing>
 </p:sld>
 </file>
 
@@ -3570,10 +3520,9 @@
           <a:lstStyle/>
           <a:p>
             <a:r>
-              <a:rPr lang="ru-RU" dirty="0" smtClean="0"/>
+              <a:rPr lang="ru-RU" dirty="0"/>
               <a:t>Одноразовый блокнот – абсолютно стойкий шифр</a:t>
             </a:r>
-            <a:endParaRPr lang="ru-RU" dirty="0"/>
           </a:p>
         </p:txBody>
       </p:sp>
@@ -3600,11 +3549,7 @@
                   <a:buNone/>
                 </a:pPr>
                 <a:r>
-                  <a:rPr lang="ru-RU" b="1" dirty="0" smtClean="0"/>
-                  <a:t>Теорема 1.2. </a:t>
-                </a:r>
-                <a:r>
-                  <a:rPr lang="ru-RU" dirty="0" smtClean="0"/>
+                  <a:rPr lang="ru-RU" dirty="0"/>
                   <a:t>Пусть </a:t>
                 </a:r>
                 <a14:m>
@@ -3656,7 +3601,7 @@
                   </m:oMath>
                 </a14:m>
                 <a:r>
-                  <a:rPr lang="ru-RU" dirty="0" smtClean="0"/>
+                  <a:rPr lang="ru-RU" dirty="0"/>
                   <a:t> - одноразовый блокнот при </a:t>
                 </a:r>
                 <a14:m>
@@ -3738,7 +3683,7 @@
                   </m:oMath>
                 </a14:m>
                 <a:r>
-                  <a:rPr lang="ru-RU" dirty="0" smtClean="0"/>
+                  <a:rPr lang="ru-RU" dirty="0"/>
                   <a:t> для параметра </a:t>
                 </a:r>
                 <a14:m>
@@ -3752,7 +3697,7 @@
                   </m:oMath>
                 </a14:m>
                 <a:r>
-                  <a:rPr lang="ru-RU" dirty="0" smtClean="0"/>
+                  <a:rPr lang="ru-RU" dirty="0"/>
                   <a:t>. Тогда </a:t>
                 </a:r>
                 <a14:m>
@@ -3769,14 +3714,14 @@
                   </m:oMath>
                 </a14:m>
                 <a:r>
-                  <a:rPr lang="en-US" dirty="0" smtClean="0"/>
+                  <a:rPr lang="en-US" dirty="0"/>
                   <a:t> </a:t>
                 </a:r>
                 <a:r>
-                  <a:rPr lang="ru-RU" dirty="0" smtClean="0"/>
+                  <a:rPr lang="ru-RU" dirty="0"/>
                   <a:t>– абсолютно стойкий шифр.</a:t>
                 </a:r>
-                <a:endParaRPr lang="en-US" dirty="0" smtClean="0"/>
+                <a:endParaRPr lang="en-US" dirty="0"/>
               </a:p>
               <a:p>
                 <a:endParaRPr lang="en-US" dirty="0"/>
@@ -3786,15 +3731,15 @@
                   <a:buNone/>
                 </a:pPr>
                 <a:r>
-                  <a:rPr lang="ru-RU" dirty="0" smtClean="0"/>
+                  <a:rPr lang="ru-RU" dirty="0"/>
                   <a:t>Формальное определение – посмотреть самостоятельно. Суть коротко – вероятность для фиксированного </a:t>
                 </a:r>
                 <a:r>
-                  <a:rPr lang="ru-RU" dirty="0" err="1" smtClean="0"/>
+                  <a:rPr lang="ru-RU" dirty="0" err="1"/>
                   <a:t>шифртекста</a:t>
                 </a:r>
                 <a:r>
-                  <a:rPr lang="ru-RU" dirty="0" smtClean="0"/>
+                  <a:rPr lang="ru-RU" dirty="0"/>
                   <a:t> </a:t>
                 </a:r>
                 <a14:m>
@@ -3808,7 +3753,7 @@
                   </m:oMath>
                 </a14:m>
                 <a:r>
-                  <a:rPr lang="ru-RU" dirty="0" smtClean="0"/>
+                  <a:rPr lang="ru-RU" dirty="0"/>
                   <a:t> соответствовать одному из открытых текстов </a:t>
                 </a:r>
                 <a14:m>
@@ -3872,20 +3817,28 @@
                   </m:oMath>
                 </a14:m>
                 <a:r>
-                  <a:rPr lang="ru-RU" dirty="0" smtClean="0"/>
+                  <a:rPr lang="ru-RU" dirty="0"/>
                   <a:t> одинакова при незнании ключа.</a:t>
                 </a:r>
               </a:p>
               <a:p>
-                <a:endParaRPr lang="en-US" dirty="0" smtClean="0"/>
+                <a:endParaRPr lang="en-US" dirty="0"/>
               </a:p>
               <a:p>
                 <a:pPr marL="0" indent="0">
                   <a:buNone/>
                 </a:pPr>
                 <a:r>
-                  <a:rPr lang="ru-RU" dirty="0" smtClean="0"/>
-                  <a:t>Следствия абсолютной стойкости – невозможны атаки, лучше чем атаки прямым перебором ключевого множества.</a:t>
+                  <a:rPr lang="ru-RU" dirty="0"/>
+                  <a:t>Следствия абсолютной стойкости – невозможны атаки, лучше чем простое угадывание открытого текста</a:t>
+                </a:r>
+                <a:r>
+                  <a:rPr lang="en-US" dirty="0"/>
+                  <a:t>/</a:t>
+                </a:r>
+                <a:r>
+                  <a:rPr lang="ru-RU" dirty="0"/>
+                  <a:t>ключа.</a:t>
                 </a:r>
               </a:p>
               <a:p>
@@ -3899,7 +3852,7 @@
                   <a:buNone/>
                 </a:pPr>
                 <a:r>
-                  <a:rPr lang="ru-RU" dirty="0" smtClean="0"/>
+                  <a:rPr lang="ru-RU" dirty="0"/>
                   <a:t>Сложность атаки - </a:t>
                 </a:r>
                 <a14:m>
@@ -3948,10 +3901,10 @@
               </p:nvPr>
             </p:nvSpPr>
             <p:spPr>
-              <a:blipFill rotWithShape="0">
+              <a:blipFill>
                 <a:blip r:embed="rId2"/>
                 <a:stretch>
-                  <a:fillRect l="-1043" t="-2801" r="-290" b="-3641"/>
+                  <a:fillRect l="-1043" t="-2801" r="-58" b="-3641"/>
                 </a:stretch>
               </a:blipFill>
             </p:spPr>
@@ -4003,13 +3956,6 @@
   <p:clrMapOvr>
     <a:masterClrMapping/>
   </p:clrMapOvr>
-  <p:timing>
-    <p:tnLst>
-      <p:par>
-        <p:cTn id="1" dur="indefinite" restart="never" nodeType="tmRoot"/>
-      </p:par>
-    </p:tnLst>
-  </p:timing>
 </p:sld>
 </file>
 
@@ -4084,10 +4030,9 @@
           <a:lstStyle/>
           <a:p>
             <a:r>
-              <a:rPr lang="ru-RU" dirty="0" smtClean="0"/>
+              <a:rPr lang="ru-RU" dirty="0"/>
               <a:t>Плохие новости</a:t>
             </a:r>
-            <a:endParaRPr lang="ru-RU" dirty="0"/>
           </a:p>
         </p:txBody>
       </p:sp>
@@ -4114,19 +4059,19 @@
                   <a:buNone/>
                 </a:pPr>
                 <a:r>
-                  <a:rPr lang="ru-RU" b="1" dirty="0" smtClean="0"/>
+                  <a:rPr lang="ru-RU" b="1" dirty="0"/>
                   <a:t>Теорема 1.</a:t>
                 </a:r>
                 <a:r>
-                  <a:rPr lang="en-US" b="1" dirty="0" smtClean="0"/>
+                  <a:rPr lang="en-US" b="1" dirty="0"/>
                   <a:t>7</a:t>
                 </a:r>
                 <a:r>
-                  <a:rPr lang="ru-RU" b="1" dirty="0" smtClean="0"/>
+                  <a:rPr lang="ru-RU" b="1" dirty="0"/>
                   <a:t> (Шеннона).</a:t>
                 </a:r>
                 <a:r>
-                  <a:rPr lang="ru-RU" dirty="0" smtClean="0"/>
+                  <a:rPr lang="ru-RU" dirty="0"/>
                   <a:t> Пусть </a:t>
                 </a:r>
                 <a14:m>
@@ -4178,7 +4123,7 @@
                   </m:oMath>
                 </a14:m>
                 <a:r>
-                  <a:rPr lang="ru-RU" dirty="0" smtClean="0"/>
+                  <a:rPr lang="ru-RU" dirty="0"/>
                   <a:t> шифр Шеннона на </a:t>
                 </a:r>
                 <a14:m>
@@ -4233,7 +4178,7 @@
                   </m:oMath>
                 </a14:m>
                 <a:r>
-                  <a:rPr lang="ru-RU" dirty="0" smtClean="0"/>
+                  <a:rPr lang="ru-RU" dirty="0"/>
                   <a:t> Если </a:t>
                 </a:r>
                 <a14:m>
@@ -4250,7 +4195,7 @@
                   </m:oMath>
                 </a14:m>
                 <a:r>
-                  <a:rPr lang="ru-RU" dirty="0" smtClean="0"/>
+                  <a:rPr lang="ru-RU" dirty="0"/>
                   <a:t> – абсолютно стойкий, то </a:t>
                 </a:r>
               </a:p>
@@ -4303,7 +4248,7 @@
                     </m:d>
                   </m:oMath>
                 </a14:m>
-                <a:endParaRPr lang="en-US" b="0" dirty="0" smtClean="0"/>
+                <a:endParaRPr lang="en-US" b="0" dirty="0"/>
               </a:p>
               <a:p>
                 <a14:m>
@@ -4363,7 +4308,7 @@
                   </m:oMath>
                 </a14:m>
                 <a:r>
-                  <a:rPr lang="en-US" b="0" dirty="0" smtClean="0"/>
+                  <a:rPr lang="en-US" b="0" dirty="0"/>
                   <a:t>, </a:t>
                 </a:r>
                 <a14:m>
@@ -4408,7 +4353,7 @@
                   </m:oMath>
                 </a14:m>
                 <a:r>
-                  <a:rPr lang="en-US" b="0" dirty="0" smtClean="0"/>
+                  <a:rPr lang="en-US" b="0" dirty="0"/>
                   <a:t>, </a:t>
                 </a:r>
                 <a14:m>
@@ -4452,56 +4397,6 @@
                     </m:r>
                   </m:oMath>
                 </a14:m>
-                <a:endParaRPr lang="ru-RU" dirty="0" smtClean="0"/>
-              </a:p>
-              <a:p>
-                <a:pPr marL="0" indent="0">
-                  <a:buNone/>
-                </a:pPr>
-                <a:r>
-                  <a:rPr lang="ru-RU" dirty="0" smtClean="0"/>
-                  <a:t>Простое объяснение – невозможно получить равномерно распределённую случайную величину длины </a:t>
-                </a:r>
-                <a14:m>
-                  <m:oMath xmlns:m="http://schemas.openxmlformats.org/officeDocument/2006/math">
-                    <m:r>
-                      <a:rPr lang="en-US" b="0" i="1" smtClean="0">
-                        <a:latin typeface="Cambria Math" panose="02040503050406030204" pitchFamily="18" charset="0"/>
-                      </a:rPr>
-                      <m:t>𝑚</m:t>
-                    </m:r>
-                  </m:oMath>
-                </a14:m>
-                <a:r>
-                  <a:rPr lang="ru-RU" dirty="0" smtClean="0"/>
-                  <a:t>, используя детерминированный алгоритм над равномерно распределённой случайной величиной длины </a:t>
-                </a:r>
-                <a14:m>
-                  <m:oMath xmlns:m="http://schemas.openxmlformats.org/officeDocument/2006/math">
-                    <m:r>
-                      <a:rPr lang="en-US" b="0" i="1" smtClean="0">
-                        <a:latin typeface="Cambria Math" panose="02040503050406030204" pitchFamily="18" charset="0"/>
-                      </a:rPr>
-                      <m:t>𝑛</m:t>
-                    </m:r>
-                    <m:r>
-                      <a:rPr lang="en-US" b="0" i="1" smtClean="0">
-                        <a:latin typeface="Cambria Math" panose="02040503050406030204" pitchFamily="18" charset="0"/>
-                      </a:rPr>
-                      <m:t>&lt;</m:t>
-                    </m:r>
-                    <m:r>
-                      <a:rPr lang="en-US" b="0" i="1" smtClean="0">
-                        <a:latin typeface="Cambria Math" panose="02040503050406030204" pitchFamily="18" charset="0"/>
-                      </a:rPr>
-                      <m:t>𝑚</m:t>
-                    </m:r>
-                  </m:oMath>
-                </a14:m>
-                <a:r>
-                  <a:rPr lang="ru-RU" dirty="0" smtClean="0"/>
-                  <a:t>.</a:t>
-                </a:r>
                 <a:endParaRPr lang="ru-RU" dirty="0"/>
               </a:p>
               <a:p>
@@ -4509,34 +4404,83 @@
                   <a:buNone/>
                 </a:pPr>
                 <a:r>
-                  <a:rPr lang="ru-RU" b="0" dirty="0" smtClean="0"/>
+                  <a:rPr lang="ru-RU" dirty="0"/>
+                  <a:t>Простое объяснение – невозможно получить равномерно распределённую случайную величину длины </a:t>
+                </a:r>
+                <a14:m>
+                  <m:oMath xmlns:m="http://schemas.openxmlformats.org/officeDocument/2006/math">
+                    <m:r>
+                      <a:rPr lang="en-US" b="0" i="1" smtClean="0">
+                        <a:latin typeface="Cambria Math" panose="02040503050406030204" pitchFamily="18" charset="0"/>
+                      </a:rPr>
+                      <m:t>𝑚</m:t>
+                    </m:r>
+                  </m:oMath>
+                </a14:m>
+                <a:r>
+                  <a:rPr lang="ru-RU" dirty="0"/>
+                  <a:t>, используя детерминированный алгоритм над равномерно распределённой случайной величиной длины </a:t>
+                </a:r>
+                <a14:m>
+                  <m:oMath xmlns:m="http://schemas.openxmlformats.org/officeDocument/2006/math">
+                    <m:r>
+                      <a:rPr lang="en-US" b="0" i="1" smtClean="0">
+                        <a:latin typeface="Cambria Math" panose="02040503050406030204" pitchFamily="18" charset="0"/>
+                      </a:rPr>
+                      <m:t>𝑛</m:t>
+                    </m:r>
+                    <m:r>
+                      <a:rPr lang="en-US" b="0" i="1" smtClean="0">
+                        <a:latin typeface="Cambria Math" panose="02040503050406030204" pitchFamily="18" charset="0"/>
+                      </a:rPr>
+                      <m:t>&lt;</m:t>
+                    </m:r>
+                    <m:r>
+                      <a:rPr lang="en-US" b="0" i="1" smtClean="0">
+                        <a:latin typeface="Cambria Math" panose="02040503050406030204" pitchFamily="18" charset="0"/>
+                      </a:rPr>
+                      <m:t>𝑚</m:t>
+                    </m:r>
+                  </m:oMath>
+                </a14:m>
+                <a:r>
+                  <a:rPr lang="ru-RU" dirty="0"/>
+                  <a:t>.</a:t>
+                </a:r>
+              </a:p>
+              <a:p>
+                <a:pPr marL="0" indent="0">
+                  <a:buNone/>
+                </a:pPr>
+                <a:r>
+                  <a:rPr lang="ru-RU" b="0" dirty="0"/>
                   <a:t>Иными словами, для шифрования 1 </a:t>
                 </a:r>
                 <a:r>
-                  <a:rPr lang="en-US" b="0" dirty="0" smtClean="0"/>
+                  <a:rPr lang="en-US" b="0" dirty="0"/>
                   <a:t>Gb </a:t>
                 </a:r>
                 <a:r>
-                  <a:rPr lang="ru-RU" b="0" dirty="0" smtClean="0"/>
+                  <a:rPr lang="ru-RU" b="0" dirty="0"/>
                   <a:t>данных </a:t>
                 </a:r>
                 <a:r>
-                  <a:rPr lang="ru-RU" b="1" dirty="0" smtClean="0"/>
+                  <a:rPr lang="ru-RU" b="1" dirty="0"/>
                   <a:t>любым</a:t>
                 </a:r>
                 <a:r>
-                  <a:rPr lang="ru-RU" b="0" dirty="0" smtClean="0"/>
+                  <a:rPr lang="ru-RU" b="0" dirty="0"/>
                   <a:t> абсолютно стойким шифром потребуется ключ размера как минимум 1 </a:t>
                 </a:r>
                 <a:r>
-                  <a:rPr lang="en-US" b="0" dirty="0" smtClean="0"/>
+                  <a:rPr lang="en-US" b="0" dirty="0"/>
                   <a:t>Gb</a:t>
                 </a:r>
                 <a:r>
-                  <a:rPr lang="ru-RU" dirty="0" smtClean="0"/>
+                  <a:rPr lang="ru-RU" dirty="0"/>
                   <a:t>.</a:t>
                 </a:r>
-                <a:endParaRPr lang="en-US" b="0" dirty="0" smtClean="0"/>
+                <a:endParaRPr lang="en-US" b="0" dirty="0"/>
               </a:p>
             </p:txBody>
           </p:sp>
@@ -4608,13 +4552,6 @@
   <p:clrMapOvr>
     <a:masterClrMapping/>
   </p:clrMapOvr>
-  <p:timing>
-    <p:tnLst>
-      <p:par>
-        <p:cTn id="1" dur="indefinite" restart="never" nodeType="tmRoot"/>
-      </p:par>
-    </p:tnLst>
-  </p:timing>
 </p:sld>
 </file>
 
@@ -4651,10 +4588,9 @@
           <a:lstStyle/>
           <a:p>
             <a:r>
-              <a:rPr lang="ru-RU" dirty="0" smtClean="0"/>
+              <a:rPr lang="ru-RU" dirty="0"/>
               <a:t>Идея одноразового блокнота</a:t>
             </a:r>
-            <a:endParaRPr lang="ru-RU" dirty="0"/>
           </a:p>
         </p:txBody>
       </p:sp>
@@ -4677,15 +4613,15 @@
               <a:buNone/>
             </a:pPr>
             <a:r>
-              <a:rPr lang="ru-RU" dirty="0" smtClean="0"/>
+              <a:rPr lang="ru-RU" dirty="0"/>
               <a:t>Одноразовый блокнот – сложение (побитное) случайного равновероятного вектора ключа с вектором открытого текста, для получения </a:t>
             </a:r>
             <a:r>
-              <a:rPr lang="ru-RU" dirty="0" err="1" smtClean="0"/>
+              <a:rPr lang="ru-RU" dirty="0" err="1"/>
               <a:t>шифртекста</a:t>
             </a:r>
             <a:r>
-              <a:rPr lang="ru-RU" dirty="0" smtClean="0"/>
+              <a:rPr lang="ru-RU" dirty="0"/>
               <a:t>.</a:t>
             </a:r>
           </a:p>
@@ -4700,7 +4636,7 @@
               <a:buNone/>
             </a:pPr>
             <a:r>
-              <a:rPr lang="ru-RU" dirty="0" smtClean="0"/>
+              <a:rPr lang="ru-RU" dirty="0"/>
               <a:t>Проблема (Теорема Шеннона) – длина (энтропия) ключа должна быть больше или равна длине сообщения.</a:t>
             </a:r>
           </a:p>
@@ -4715,10 +4651,9 @@
               <a:buNone/>
             </a:pPr>
             <a:r>
-              <a:rPr lang="ru-RU" dirty="0" smtClean="0"/>
+              <a:rPr lang="ru-RU" dirty="0"/>
               <a:t>Основная идея – заменить случайный длинный вектор ключа на «псевдослучайную» последовательность, называемую гаммой.</a:t>
             </a:r>
-            <a:endParaRPr lang="ru-RU" dirty="0"/>
           </a:p>
         </p:txBody>
       </p:sp>
@@ -4755,13 +4690,6 @@
   <p:clrMapOvr>
     <a:masterClrMapping/>
   </p:clrMapOvr>
-  <p:timing>
-    <p:tnLst>
-      <p:par>
-        <p:cTn id="1" dur="indefinite" restart="never" nodeType="tmRoot"/>
-      </p:par>
-    </p:tnLst>
-  </p:timing>
 </p:sld>
 </file>
 
@@ -5784,7 +5712,7 @@
                   <a:buNone/>
                 </a:pPr>
                 <a:r>
-                  <a:rPr lang="ru-RU" dirty="0" smtClean="0"/>
+                  <a:rPr lang="ru-RU" dirty="0"/>
                   <a:t>Заменяем использование случайного ключа </a:t>
                 </a:r>
                 <a14:m>
@@ -5798,7 +5726,7 @@
                   </m:oMath>
                 </a14:m>
                 <a:r>
-                  <a:rPr lang="ru-RU" dirty="0" smtClean="0"/>
+                  <a:rPr lang="ru-RU" dirty="0"/>
                   <a:t> псевдослучайной последовательностью </a:t>
                 </a:r>
                 <a14:m>
@@ -5812,15 +5740,15 @@
                   </m:oMath>
                 </a14:m>
                 <a:r>
-                  <a:rPr lang="ru-RU" dirty="0" smtClean="0"/>
+                  <a:rPr lang="ru-RU" dirty="0"/>
                   <a:t>. Если последовательность «неотличима» от случайной  равновероятной, то </a:t>
                 </a:r>
                 <a:r>
-                  <a:rPr lang="ru-RU" dirty="0" err="1" smtClean="0"/>
+                  <a:rPr lang="ru-RU" dirty="0" err="1"/>
                   <a:t>шифртекст</a:t>
                 </a:r>
                 <a:r>
-                  <a:rPr lang="ru-RU" dirty="0" smtClean="0"/>
+                  <a:rPr lang="ru-RU" dirty="0"/>
                   <a:t> </a:t>
                 </a:r>
                 <a14:m>
@@ -5840,22 +5768,21 @@
                   </m:oMath>
                 </a14:m>
                 <a:r>
-                  <a:rPr lang="en-US" dirty="0" smtClean="0"/>
+                  <a:rPr lang="en-US" dirty="0"/>
                   <a:t> </a:t>
                 </a:r>
                 <a:r>
-                  <a:rPr lang="ru-RU" dirty="0" smtClean="0"/>
+                  <a:rPr lang="ru-RU" dirty="0"/>
                   <a:t>неотличим от </a:t>
                 </a:r>
                 <a:r>
-                  <a:rPr lang="ru-RU" dirty="0" err="1" smtClean="0"/>
+                  <a:rPr lang="ru-RU" dirty="0" err="1"/>
                   <a:t>шифртекста</a:t>
                 </a:r>
                 <a:r>
-                  <a:rPr lang="ru-RU" dirty="0" smtClean="0"/>
+                  <a:rPr lang="ru-RU" dirty="0"/>
                   <a:t> в одноразовом блокноте.</a:t>
                 </a:r>
-                <a:endParaRPr lang="ru-RU" dirty="0"/>
               </a:p>
             </p:txBody>
           </p:sp>
@@ -6207,13 +6134,6 @@
   <p:clrMapOvr>
     <a:masterClrMapping/>
   </p:clrMapOvr>
-  <p:timing>
-    <p:tnLst>
-      <p:par>
-        <p:cTn id="1" dur="indefinite" restart="never" nodeType="tmRoot"/>
-      </p:par>
-    </p:tnLst>
-  </p:timing>
 </p:sld>
 </file>
 
@@ -6250,10 +6170,9 @@
           <a:lstStyle/>
           <a:p>
             <a:r>
-              <a:rPr lang="ru-RU" dirty="0" smtClean="0"/>
+              <a:rPr lang="ru-RU" dirty="0"/>
               <a:t>Поточный шифр</a:t>
             </a:r>
-            <a:endParaRPr lang="ru-RU" dirty="0"/>
           </a:p>
         </p:txBody>
       </p:sp>
@@ -6280,7 +6199,7 @@
                   <a:buNone/>
                 </a:pPr>
                 <a:r>
-                  <a:rPr lang="ru-RU" dirty="0" smtClean="0"/>
+                  <a:rPr lang="ru-RU" dirty="0"/>
                   <a:t>Эффективно вычислимая функция </a:t>
                 </a:r>
                 <a14:m>
@@ -6318,23 +6237,23 @@
                   </m:oMath>
                 </a14:m>
                 <a:r>
-                  <a:rPr lang="en-US" dirty="0" smtClean="0"/>
+                  <a:rPr lang="en-US" dirty="0"/>
                   <a:t> </a:t>
                 </a:r>
                 <a:r>
-                  <a:rPr lang="ru-RU" dirty="0" smtClean="0"/>
+                  <a:rPr lang="ru-RU" dirty="0"/>
                   <a:t>называется </a:t>
                 </a:r>
                 <a:r>
-                  <a:rPr lang="ru-RU" b="1" dirty="0" smtClean="0"/>
+                  <a:rPr lang="ru-RU" b="1" dirty="0"/>
                   <a:t>псевдослучайным генератором</a:t>
                 </a:r>
                 <a:r>
-                  <a:rPr lang="en-US" dirty="0" smtClean="0"/>
+                  <a:rPr lang="en-US" dirty="0"/>
                   <a:t> </a:t>
                 </a:r>
                 <a:r>
-                  <a:rPr lang="ru-RU" dirty="0" smtClean="0"/>
+                  <a:rPr lang="ru-RU" dirty="0"/>
                   <a:t>на </a:t>
                 </a:r>
                 <a14:m>
@@ -6372,15 +6291,15 @@
                   </m:oMath>
                 </a14:m>
                 <a:r>
-                  <a:rPr lang="ru-RU" dirty="0" smtClean="0"/>
+                  <a:rPr lang="ru-RU" dirty="0"/>
                   <a:t> </a:t>
                 </a:r>
                 <a:r>
-                  <a:rPr lang="en-US" b="1" dirty="0" smtClean="0"/>
+                  <a:rPr lang="en-US" b="1" dirty="0"/>
                   <a:t>PRG</a:t>
                 </a:r>
                 <a:r>
-                  <a:rPr lang="ru-RU" dirty="0" smtClean="0"/>
+                  <a:rPr lang="ru-RU" dirty="0"/>
                   <a:t>.</a:t>
                 </a:r>
               </a:p>
@@ -6389,7 +6308,7 @@
                   <a:buNone/>
                 </a:pPr>
                 <a:r>
-                  <a:rPr lang="ru-RU" dirty="0" smtClean="0"/>
+                  <a:rPr lang="ru-RU" dirty="0"/>
                   <a:t>Шифр </a:t>
                 </a:r>
                 <a14:m>
@@ -6441,7 +6360,7 @@
                   </m:oMath>
                 </a14:m>
                 <a:r>
-                  <a:rPr lang="ru-RU" dirty="0" smtClean="0"/>
+                  <a:rPr lang="ru-RU" dirty="0"/>
                   <a:t> с параметрам </a:t>
                 </a:r>
                 <a14:m>
@@ -6479,7 +6398,7 @@
                   </m:oMath>
                 </a14:m>
                 <a:r>
-                  <a:rPr lang="ru-RU" dirty="0" smtClean="0"/>
+                  <a:rPr lang="ru-RU" dirty="0"/>
                   <a:t> на </a:t>
                 </a:r>
                 <a14:m>
@@ -6652,15 +6571,15 @@
                   </m:oMath>
                 </a14:m>
                 <a:r>
-                  <a:rPr lang="ru-RU" dirty="0" smtClean="0"/>
+                  <a:rPr lang="ru-RU" dirty="0"/>
                   <a:t>, называется </a:t>
                 </a:r>
                 <a:r>
-                  <a:rPr lang="ru-RU" b="1" dirty="0" smtClean="0"/>
+                  <a:rPr lang="ru-RU" b="1" dirty="0"/>
                   <a:t>поточным шифром</a:t>
                 </a:r>
                 <a:r>
-                  <a:rPr lang="ru-RU" dirty="0" smtClean="0"/>
+                  <a:rPr lang="ru-RU" dirty="0"/>
                   <a:t>, если </a:t>
                 </a:r>
               </a:p>
@@ -6755,7 +6674,7 @@
                   </m:oMath>
                 </a14:m>
                 <a:r>
-                  <a:rPr lang="ru-RU" dirty="0" smtClean="0"/>
+                  <a:rPr lang="ru-RU" dirty="0"/>
                   <a:t> </a:t>
                 </a:r>
               </a:p>
@@ -6764,7 +6683,7 @@
                   <a:buNone/>
                 </a:pPr>
                 <a:r>
-                  <a:rPr lang="ru-RU" dirty="0" smtClean="0"/>
+                  <a:rPr lang="ru-RU" dirty="0"/>
                   <a:t>где</a:t>
                 </a:r>
                 <a14:m>
@@ -6872,11 +6791,11 @@
                   </m:oMath>
                 </a14:m>
                 <a:r>
-                  <a:rPr lang="en-US" dirty="0" smtClean="0"/>
+                  <a:rPr lang="en-US" dirty="0"/>
                   <a:t> - </a:t>
                 </a:r>
                 <a:r>
-                  <a:rPr lang="ru-RU" dirty="0" smtClean="0"/>
+                  <a:rPr lang="ru-RU" dirty="0"/>
                   <a:t>псевдослучайный генератор.</a:t>
                 </a:r>
               </a:p>
@@ -6888,7 +6807,7 @@
                   <a:buNone/>
                 </a:pPr>
                 <a:r>
-                  <a:rPr lang="ru-RU" dirty="0" smtClean="0"/>
+                  <a:rPr lang="ru-RU" dirty="0"/>
                   <a:t>Аналогично можно ввести Поточный шифр по произвольному модулю.</a:t>
                 </a:r>
               </a:p>
@@ -6903,7 +6822,7 @@
                   <a:buNone/>
                 </a:pPr>
                 <a:r>
-                  <a:rPr lang="ru-RU" dirty="0" smtClean="0"/>
+                  <a:rPr lang="ru-RU" dirty="0"/>
                   <a:t>Стойкость поточного шифра сводится к «качеству» псевдослучайной последовательности </a:t>
                 </a:r>
                 <a14:m>
@@ -7018,13 +6937,6 @@
   <p:clrMapOvr>
     <a:masterClrMapping/>
   </p:clrMapOvr>
-  <p:timing>
-    <p:tnLst>
-      <p:par>
-        <p:cTn id="1" dur="indefinite" restart="never" nodeType="tmRoot"/>
-      </p:par>
-    </p:tnLst>
-  </p:timing>
 </p:sld>
 </file>
 
@@ -7061,10 +6973,9 @@
           <a:lstStyle/>
           <a:p>
             <a:r>
-              <a:rPr lang="ru-RU" dirty="0" smtClean="0"/>
+              <a:rPr lang="ru-RU" dirty="0"/>
               <a:t>Блочный шифр</a:t>
             </a:r>
-            <a:endParaRPr lang="ru-RU" dirty="0"/>
           </a:p>
         </p:txBody>
       </p:sp>
@@ -7096,11 +7007,11 @@
                   <a:buNone/>
                 </a:pPr>
                 <a:r>
-                  <a:rPr lang="ru-RU" b="1" dirty="0" smtClean="0"/>
+                  <a:rPr lang="ru-RU" b="1" dirty="0"/>
                   <a:t>Блочный шифр </a:t>
                 </a:r>
                 <a:r>
-                  <a:rPr lang="ru-RU" dirty="0" smtClean="0"/>
+                  <a:rPr lang="ru-RU" dirty="0"/>
                   <a:t>– детерминированный шифр </a:t>
                 </a:r>
                 <a14:m>
@@ -7158,15 +7069,15 @@
                   </m:oMath>
                 </a14:m>
                 <a:r>
-                  <a:rPr lang="en-US" dirty="0" smtClean="0"/>
+                  <a:rPr lang="en-US" dirty="0"/>
                   <a:t>о</a:t>
                 </a:r>
                 <a:r>
-                  <a:rPr lang="ru-RU" dirty="0" err="1" smtClean="0"/>
+                  <a:rPr lang="ru-RU" dirty="0" err="1"/>
                   <a:t>пределённый</a:t>
                 </a:r>
                 <a:r>
-                  <a:rPr lang="ru-RU" dirty="0" smtClean="0"/>
+                  <a:rPr lang="ru-RU" dirty="0"/>
                   <a:t> на </a:t>
                 </a:r>
                 <a14:m>
@@ -7209,7 +7120,7 @@
                   </m:oMath>
                 </a14:m>
                 <a:r>
-                  <a:rPr lang="ru-RU" dirty="0" smtClean="0"/>
+                  <a:rPr lang="ru-RU" dirty="0"/>
                   <a:t> </a:t>
                 </a:r>
                 <a14:m>
@@ -7264,7 +7175,7 @@
                     </m:r>
                   </m:oMath>
                 </a14:m>
-                <a:endParaRPr lang="en-US" dirty="0" smtClean="0"/>
+                <a:endParaRPr lang="en-US" dirty="0"/>
               </a:p>
               <a:p>
                 <a:pPr marL="0" indent="0">
@@ -7293,7 +7204,7 @@
                   </m:oMath>
                 </a14:m>
                 <a:r>
-                  <a:rPr lang="ru-RU" dirty="0" smtClean="0"/>
+                  <a:rPr lang="ru-RU" dirty="0"/>
                   <a:t> – блок данных, </a:t>
                 </a:r>
                 <a14:m>
@@ -7307,7 +7218,7 @@
                   </m:oMath>
                 </a14:m>
                 <a:r>
-                  <a:rPr lang="ru-RU" dirty="0" smtClean="0"/>
+                  <a:rPr lang="ru-RU" dirty="0"/>
                   <a:t> – множество блоков, </a:t>
                 </a:r>
                 <a14:m>
@@ -7321,7 +7232,7 @@
                   </m:oMath>
                 </a14:m>
                 <a:r>
-                  <a:rPr lang="ru-RU" dirty="0" smtClean="0"/>
+                  <a:rPr lang="ru-RU" dirty="0"/>
                   <a:t> – множество ключей блочного шифра.</a:t>
                 </a:r>
               </a:p>
@@ -7330,7 +7241,7 @@
                   <a:buNone/>
                 </a:pPr>
                 <a:r>
-                  <a:rPr lang="ru-RU" dirty="0" smtClean="0"/>
+                  <a:rPr lang="ru-RU" dirty="0"/>
                   <a:t>Для ключа </a:t>
                 </a:r>
                 <a14:m>
@@ -7356,7 +7267,7 @@
                   </m:oMath>
                 </a14:m>
                 <a:r>
-                  <a:rPr lang="ru-RU" dirty="0" smtClean="0"/>
+                  <a:rPr lang="ru-RU" dirty="0"/>
                   <a:t> определим функцию </a:t>
                 </a:r>
                 <a14:m>
@@ -7485,7 +7396,7 @@
                   </m:oMath>
                 </a14:m>
                 <a:r>
-                  <a:rPr lang="en-US" dirty="0" smtClean="0"/>
+                  <a:rPr lang="en-US" dirty="0"/>
                   <a:t> </a:t>
                 </a:r>
                 <a14:m>
@@ -7629,7 +7540,7 @@
                     </m:r>
                   </m:oMath>
                 </a14:m>
-                <a:endParaRPr lang="en-US" dirty="0" smtClean="0"/>
+                <a:endParaRPr lang="en-US" dirty="0"/>
               </a:p>
               <a:p>
                 <a:pPr marL="0" indent="0">
@@ -7642,7 +7553,7 @@
                   <a:buNone/>
                 </a:pPr>
                 <a:r>
-                  <a:rPr lang="ru-RU" dirty="0" smtClean="0"/>
+                  <a:rPr lang="ru-RU" dirty="0"/>
                   <a:t>Из свойства корректности имеем </a:t>
                 </a:r>
                 <a14:m>
@@ -7714,20 +7625,8 @@
                   </m:oMath>
                 </a14:m>
                 <a:r>
-                  <a:rPr lang="ru-RU" dirty="0" smtClean="0"/>
-                  <a:t> </a:t>
-                </a:r>
-                <a:r>
                   <a:rPr lang="ru-RU" dirty="0"/>
-                  <a:t>- </a:t>
-                </a:r>
-                <a:r>
-                  <a:rPr lang="ru-RU" dirty="0" smtClean="0"/>
-                  <a:t>подстановки </a:t>
-                </a:r>
-                <a:r>
-                  <a:rPr lang="ru-RU" dirty="0"/>
-                  <a:t>на множестве </a:t>
+                  <a:t> - подстановки на множестве </a:t>
                 </a:r>
                 <a14:m>
                   <m:oMath xmlns:m="http://schemas.openxmlformats.org/officeDocument/2006/math">
@@ -7746,7 +7645,7 @@
                   </m:oMath>
                 </a14:m>
                 <a:r>
-                  <a:rPr lang="ru-RU" dirty="0" smtClean="0"/>
+                  <a:rPr lang="ru-RU" dirty="0"/>
                   <a:t> </a:t>
                 </a:r>
                 <a14:m>
@@ -7830,11 +7729,11 @@
                   </m:oMath>
                 </a14:m>
                 <a:r>
-                  <a:rPr lang="en-US" dirty="0" smtClean="0"/>
+                  <a:rPr lang="en-US" dirty="0"/>
                   <a:t> </a:t>
                 </a:r>
                 <a:r>
-                  <a:rPr lang="ru-RU" dirty="0" smtClean="0"/>
+                  <a:rPr lang="ru-RU" dirty="0"/>
                   <a:t>где </a:t>
                 </a:r>
                 <a14:m>
@@ -7848,7 +7747,7 @@
                   </m:oMath>
                 </a14:m>
                 <a:r>
-                  <a:rPr lang="ru-RU" dirty="0" smtClean="0"/>
+                  <a:rPr lang="ru-RU" dirty="0"/>
                   <a:t> – тождественная подстановка на </a:t>
                 </a:r>
                 <a14:m>
@@ -7862,16 +7761,16 @@
                   </m:oMath>
                 </a14:m>
                 <a:r>
-                  <a:rPr lang="ru-RU" dirty="0" smtClean="0"/>
+                  <a:rPr lang="ru-RU" dirty="0"/>
                   <a:t>. </a:t>
                 </a:r>
-                <a:endParaRPr lang="en-US" dirty="0" smtClean="0"/>
+                <a:endParaRPr lang="en-US" dirty="0"/>
               </a:p>
               <a:p>
                 <a:pPr marL="0" indent="0">
                   <a:buNone/>
                 </a:pPr>
-                <a:endParaRPr lang="en-US" dirty="0" smtClean="0"/>
+                <a:endParaRPr lang="en-US" dirty="0"/>
               </a:p>
             </p:txBody>
           </p:sp>
@@ -7947,13 +7846,6 @@
   <p:clrMapOvr>
     <a:masterClrMapping/>
   </p:clrMapOvr>
-  <p:timing>
-    <p:tnLst>
-      <p:par>
-        <p:cTn id="1" dur="indefinite" restart="never" nodeType="tmRoot"/>
-      </p:par>
-    </p:tnLst>
-  </p:timing>
 </p:sld>
 </file>
 
@@ -7990,10 +7882,9 @@
           <a:lstStyle/>
           <a:p>
             <a:r>
-              <a:rPr lang="ru-RU" dirty="0" smtClean="0"/>
+              <a:rPr lang="ru-RU" dirty="0"/>
               <a:t>Блочный шифр</a:t>
             </a:r>
-            <a:endParaRPr lang="ru-RU" dirty="0"/>
           </a:p>
         </p:txBody>
       </p:sp>
@@ -8013,16 +7904,15 @@
           <a:lstStyle/>
           <a:p>
             <a:r>
-              <a:rPr lang="ru-RU" dirty="0" smtClean="0"/>
+              <a:rPr lang="ru-RU" dirty="0"/>
               <a:t>Блочные шифры является основным криптографическим примитивом для построения симметричных криптосистем.</a:t>
             </a:r>
           </a:p>
           <a:p>
             <a:r>
-              <a:rPr lang="ru-RU" dirty="0" smtClean="0"/>
+              <a:rPr lang="ru-RU" dirty="0"/>
               <a:t>Могут быть использованы для как схем шифрования (в схемах шифрования), так и для обеспечения аутентичности (в кодах аутентичности сообщений.</a:t>
             </a:r>
-            <a:endParaRPr lang="ru-RU" dirty="0"/>
           </a:p>
         </p:txBody>
       </p:sp>
@@ -8257,13 +8147,13 @@
               <a:t>n</a:t>
             </a:r>
             <a:r>
-              <a:rPr lang="en-US" sz="1800" dirty="0" smtClean="0">
+              <a:rPr lang="en-US" sz="1800" dirty="0">
                 <a:latin typeface="Tahoma" pitchFamily="34" charset="0"/>
               </a:rPr>
               <a:t> </a:t>
             </a:r>
             <a:r>
-              <a:rPr lang="ru-RU" sz="1800" dirty="0" smtClean="0">
+              <a:rPr lang="ru-RU" sz="1800" dirty="0">
                 <a:latin typeface="Tahoma" pitchFamily="34" charset="0"/>
               </a:rPr>
               <a:t>бит</a:t>
@@ -8359,16 +8249,10 @@
               <a:rPr lang="en-US" sz="2000" dirty="0">
                 <a:latin typeface="Tahoma" pitchFamily="34" charset="0"/>
               </a:rPr>
-              <a:t>n</a:t>
-            </a:r>
-            <a:r>
-              <a:rPr lang="en-US" sz="2000" dirty="0" smtClean="0">
-                <a:latin typeface="Tahoma" pitchFamily="34" charset="0"/>
-              </a:rPr>
-              <a:t> </a:t>
-            </a:r>
-            <a:r>
-              <a:rPr lang="ru-RU" sz="2000" dirty="0" smtClean="0">
+              <a:t>n </a:t>
+            </a:r>
+            <a:r>
+              <a:rPr lang="ru-RU" sz="2000" dirty="0">
                 <a:latin typeface="Tahoma" pitchFamily="34" charset="0"/>
               </a:rPr>
               <a:t>бит</a:t>
@@ -8467,7 +8351,7 @@
               <a:t>k </a:t>
             </a:r>
             <a:r>
-              <a:rPr lang="ru-RU" sz="1800" dirty="0" smtClean="0">
+              <a:rPr lang="ru-RU" sz="1800" dirty="0">
                 <a:latin typeface="Tahoma" pitchFamily="34" charset="0"/>
               </a:rPr>
               <a:t>бит</a:t>
@@ -8522,13 +8406,6 @@
   <p:clrMapOvr>
     <a:masterClrMapping/>
   </p:clrMapOvr>
-  <p:timing>
-    <p:tnLst>
-      <p:par>
-        <p:cTn id="1" dur="indefinite" restart="never" nodeType="tmRoot"/>
-      </p:par>
-    </p:tnLst>
-  </p:timing>
 </p:sld>
 </file>
 
@@ -8565,7 +8442,7 @@
           <a:lstStyle/>
           <a:p>
             <a:r>
-              <a:rPr lang="en-US" dirty="0" smtClean="0"/>
+              <a:rPr lang="en-US" dirty="0"/>
               <a:t>PRP</a:t>
             </a:r>
             <a:endParaRPr lang="ru-RU" dirty="0"/>
@@ -8626,7 +8503,7 @@
                   <a:buNone/>
                 </a:pPr>
                 <a:r>
-                  <a:rPr lang="ru-RU" dirty="0" smtClean="0">
+                  <a:rPr lang="ru-RU" dirty="0">
                     <a:sym typeface="Symbol" pitchFamily="18" charset="2"/>
                   </a:rPr>
                   <a:t>Пусть функция </a:t>
@@ -8685,13 +8562,13 @@
                   </m:oMath>
                 </a14:m>
                 <a:r>
-                  <a:rPr lang="en-US" dirty="0" smtClean="0">
+                  <a:rPr lang="en-US" dirty="0">
                     <a:sym typeface="Symbol" pitchFamily="18" charset="2"/>
                   </a:rPr>
                   <a:t> </a:t>
                 </a:r>
                 <a:r>
-                  <a:rPr lang="ru-RU" dirty="0" smtClean="0">
+                  <a:rPr lang="ru-RU" dirty="0">
                     <a:sym typeface="Symbol" pitchFamily="18" charset="2"/>
                   </a:rPr>
                   <a:t>определена на </a:t>
@@ -8741,7 +8618,7 @@
                   </a:rPr>
                   <a:t>. </a:t>
                 </a:r>
-                <a:endParaRPr lang="en-US" dirty="0" smtClean="0">
+                <a:endParaRPr lang="en-US" dirty="0">
                   <a:sym typeface="Symbol" pitchFamily="18" charset="2"/>
                 </a:endParaRPr>
               </a:p>
@@ -8753,7 +8630,7 @@
                   <a:buNone/>
                 </a:pPr>
                 <a:r>
-                  <a:rPr lang="ru-RU" dirty="0" smtClean="0">
+                  <a:rPr lang="ru-RU" dirty="0">
                     <a:sym typeface="Symbol" pitchFamily="18" charset="2"/>
                   </a:rPr>
                   <a:t>Тогда </a:t>
@@ -8770,37 +8647,25 @@
                   </m:oMath>
                 </a14:m>
                 <a:r>
-                  <a:rPr lang="ru-RU" dirty="0" smtClean="0">
+                  <a:rPr lang="ru-RU" dirty="0">
                     <a:sym typeface="Symbol" pitchFamily="18" charset="2"/>
                   </a:rPr>
                   <a:t> – </a:t>
                 </a:r>
                 <a:r>
-                  <a:rPr lang="ru-RU" b="1" dirty="0" smtClean="0">
+                  <a:rPr lang="ru-RU" b="1" dirty="0">
                     <a:sym typeface="Symbol" pitchFamily="18" charset="2"/>
                   </a:rPr>
                   <a:t>псевдослучайная подстановка (</a:t>
                 </a:r>
                 <a:r>
-                  <a:rPr lang="en-US" b="1" dirty="0" smtClean="0">
-                    <a:sym typeface="Symbol" pitchFamily="18" charset="2"/>
-                  </a:rPr>
-                  <a:t>PR</a:t>
-                </a:r>
-                <a:r>
                   <a:rPr lang="en-US" b="1" dirty="0">
                     <a:sym typeface="Symbol" pitchFamily="18" charset="2"/>
                   </a:rPr>
-                  <a:t>P</a:t>
-                </a:r>
-                <a:r>
-                  <a:rPr lang="en-US" b="1" dirty="0" smtClean="0">
-                    <a:sym typeface="Symbol" pitchFamily="18" charset="2"/>
-                  </a:rPr>
-                  <a:t>)</a:t>
-                </a:r>
-                <a:r>
-                  <a:rPr lang="ru-RU" dirty="0" smtClean="0">
+                  <a:t>PRP)</a:t>
+                </a:r>
+                <a:r>
+                  <a:rPr lang="ru-RU" dirty="0">
                     <a:sym typeface="Symbol" pitchFamily="18" charset="2"/>
                   </a:rPr>
                   <a:t>, если</a:t>
@@ -8813,7 +8678,7 @@
                   </a:lnSpc>
                 </a:pPr>
                 <a:r>
-                  <a:rPr lang="ru-RU" dirty="0" smtClean="0">
+                  <a:rPr lang="ru-RU" dirty="0">
                     <a:sym typeface="Symbol" pitchFamily="18" charset="2"/>
                   </a:rPr>
                   <a:t>Существует эффективный алгоритм вычисляющий </a:t>
@@ -8918,7 +8783,7 @@
                     </m:r>
                   </m:oMath>
                 </a14:m>
-                <a:endParaRPr lang="en-US" dirty="0" smtClean="0">
+                <a:endParaRPr lang="en-US" dirty="0">
                   <a:sym typeface="Symbol" pitchFamily="18" charset="2"/>
                 </a:endParaRPr>
               </a:p>
@@ -8929,7 +8794,7 @@
                   </a:lnSpc>
                 </a:pPr>
                 <a:r>
-                  <a:rPr lang="ru-RU" dirty="0" smtClean="0">
+                  <a:rPr lang="ru-RU" dirty="0">
                     <a:sym typeface="Symbol" pitchFamily="18" charset="2"/>
                   </a:rPr>
                   <a:t>Функция </a:t>
@@ -9002,12 +8867,12 @@
                   </m:oMath>
                 </a14:m>
                 <a:r>
-                  <a:rPr lang="ru-RU" dirty="0" smtClean="0">
+                  <a:rPr lang="ru-RU" dirty="0">
                     <a:sym typeface="Symbol" pitchFamily="18" charset="2"/>
                   </a:rPr>
                   <a:t> – подстановка.</a:t>
                 </a:r>
-                <a:endParaRPr lang="en-US" dirty="0" smtClean="0">
+                <a:endParaRPr lang="en-US" dirty="0">
                   <a:sym typeface="Symbol" pitchFamily="18" charset="2"/>
                 </a:endParaRPr>
               </a:p>
@@ -9019,16 +8884,22 @@
                   <a:buNone/>
                 </a:pPr>
                 <a:r>
-                  <a:rPr lang="en-US" dirty="0" smtClean="0">
+                  <a:rPr lang="en-US" b="1" dirty="0">
                     <a:sym typeface="Symbol" pitchFamily="18" charset="2"/>
                   </a:rPr>
                   <a:t>PRP </a:t>
                 </a:r>
                 <a:r>
+                  <a:rPr lang="ru-RU" b="1" dirty="0">
+                    <a:sym typeface="Symbol" pitchFamily="18" charset="2"/>
+                  </a:rPr>
+                  <a:t>стойкая</a:t>
+                </a:r>
+                <a:r>
                   <a:rPr lang="ru-RU" dirty="0">
                     <a:sym typeface="Symbol" pitchFamily="18" charset="2"/>
                   </a:rPr>
-                  <a:t>стойкая, если</a:t>
+                  <a:t>, если</a:t>
                 </a:r>
                 <a:r>
                   <a:rPr lang="en-US" dirty="0">
@@ -9213,7 +9084,7 @@
                     </m:r>
                   </m:oMath>
                 </a14:m>
-                <a:endParaRPr lang="ru-RU" dirty="0" smtClean="0">
+                <a:endParaRPr lang="ru-RU" dirty="0">
                   <a:sym typeface="Symbol" pitchFamily="18" charset="2"/>
                 </a:endParaRPr>
               </a:p>
@@ -9225,7 +9096,7 @@
                   <a:buNone/>
                 </a:pPr>
                 <a:r>
-                  <a:rPr lang="ru-RU" dirty="0" smtClean="0">
+                  <a:rPr lang="ru-RU" dirty="0">
                     <a:sym typeface="Symbol" pitchFamily="18" charset="2"/>
                   </a:rPr>
                   <a:t>(где </a:t>
@@ -9263,7 +9134,7 @@
                   </m:oMath>
                 </a14:m>
                 <a:r>
-                  <a:rPr lang="ru-RU" dirty="0" smtClean="0">
+                  <a:rPr lang="ru-RU" dirty="0">
                     <a:sym typeface="Symbol" pitchFamily="18" charset="2"/>
                   </a:rPr>
                   <a:t> - вычислительная неотличимость, </a:t>
@@ -9301,16 +9172,10 @@
                   </m:oMath>
                 </a14:m>
                 <a:r>
-                  <a:rPr lang="ru-RU" dirty="0" smtClean="0">
+                  <a:rPr lang="ru-RU" dirty="0">
                     <a:sym typeface="Symbol" pitchFamily="18" charset="2"/>
                   </a:rPr>
-                  <a:t> - выбор случайного элемента множества</a:t>
-                </a:r>
-                <a:r>
-                  <a:rPr lang="ru-RU" dirty="0" smtClean="0">
-                    <a:sym typeface="Symbol" pitchFamily="18" charset="2"/>
-                  </a:rPr>
-                  <a:t>)</a:t>
+                  <a:t> - выбор случайного элемента множества)</a:t>
                 </a:r>
               </a:p>
               <a:p>
@@ -9321,14 +9186,11 @@
                   <a:buNone/>
                 </a:pPr>
                 <a:r>
-                  <a:rPr lang="ru-RU" dirty="0" smtClean="0">
+                  <a:rPr lang="ru-RU" dirty="0">
                     <a:sym typeface="Symbol" pitchFamily="18" charset="2"/>
                   </a:rPr>
                   <a:t>Используется в качестве модели блочного шифра при анализе схем</a:t>
                 </a:r>
-                <a:endParaRPr lang="ru-RU" dirty="0">
-                  <a:sym typeface="Symbol" pitchFamily="18" charset="2"/>
-                </a:endParaRPr>
               </a:p>
             </p:txBody>
           </p:sp>
@@ -9349,7 +9211,7 @@
                 <a:off x="838200" y="1473958"/>
                 <a:ext cx="11008056" cy="4882391"/>
               </a:xfrm>
-              <a:blipFill rotWithShape="0">
+              <a:blipFill>
                 <a:blip r:embed="rId2"/>
                 <a:stretch>
                   <a:fillRect l="-997"/>
@@ -9381,13 +9243,6 @@
   <p:clrMapOvr>
     <a:masterClrMapping/>
   </p:clrMapOvr>
-  <p:timing>
-    <p:tnLst>
-      <p:par>
-        <p:cTn id="1" dur="indefinite" restart="never" nodeType="tmRoot"/>
-      </p:par>
-    </p:tnLst>
-  </p:timing>
 </p:sld>
 </file>
 
@@ -9424,10 +9279,9 @@
           <a:lstStyle/>
           <a:p>
             <a:r>
-              <a:rPr lang="ru-RU" dirty="0" smtClean="0"/>
+              <a:rPr lang="ru-RU" dirty="0"/>
               <a:t>Модель стойкого блочного шифра</a:t>
             </a:r>
-            <a:endParaRPr lang="ru-RU" dirty="0"/>
           </a:p>
         </p:txBody>
       </p:sp>
@@ -9447,28 +9301,19 @@
           <a:lstStyle/>
           <a:p>
             <a:r>
-              <a:rPr lang="ru-RU" dirty="0" smtClean="0"/>
+              <a:rPr lang="ru-RU" dirty="0"/>
               <a:t>Предполагается, что стойкий блочный шифр задаёт стойкую </a:t>
             </a:r>
             <a:r>
-              <a:rPr lang="en-US" dirty="0" smtClean="0"/>
+              <a:rPr lang="en-US" dirty="0"/>
               <a:t>PRP</a:t>
             </a:r>
           </a:p>
           <a:p>
             <a:r>
-              <a:rPr lang="ru-RU" dirty="0" smtClean="0"/>
-              <a:t>Иными словами при случайном ключе, мы ожидаем, что выход зашифрования</a:t>
-            </a:r>
-            <a:r>
               <a:rPr lang="ru-RU" dirty="0"/>
-              <a:t> </a:t>
-            </a:r>
-            <a:r>
-              <a:rPr lang="ru-RU" dirty="0" smtClean="0"/>
-              <a:t>произвольного блока блочным шифром будет вычислительно неотличим от случайного блока, выбранного случайно равновероятно.</a:t>
-            </a:r>
-            <a:endParaRPr lang="ru-RU" dirty="0"/>
+              <a:t>Иными словами при случайном ключе, мы ожидаем, что выход зашифрования произвольного блока блочным шифром будет вычислительно неотличим от случайного блока, выбранного случайно равновероятно.</a:t>
+            </a:r>
           </a:p>
         </p:txBody>
       </p:sp>
@@ -9505,13 +9350,6 @@
   <p:clrMapOvr>
     <a:masterClrMapping/>
   </p:clrMapOvr>
-  <p:timing>
-    <p:tnLst>
-      <p:par>
-        <p:cTn id="1" dur="indefinite" restart="never" nodeType="tmRoot"/>
-      </p:par>
-    </p:tnLst>
-  </p:timing>
 </p:sld>
 </file>
 
@@ -9548,23 +9386,23 @@
           <a:lstStyle/>
           <a:p>
             <a:r>
-              <a:rPr lang="en-US" dirty="0" err="1" smtClean="0"/>
+              <a:rPr lang="en-US" dirty="0" err="1"/>
               <a:t>Использование</a:t>
             </a:r>
             <a:r>
-              <a:rPr lang="en-US" dirty="0" smtClean="0"/>
+              <a:rPr lang="en-US" dirty="0"/>
               <a:t> </a:t>
             </a:r>
             <a:r>
-              <a:rPr lang="en-US" dirty="0" err="1" smtClean="0"/>
+              <a:rPr lang="en-US" dirty="0" err="1"/>
               <a:t>блочных</a:t>
             </a:r>
             <a:r>
-              <a:rPr lang="en-US" dirty="0" smtClean="0"/>
+              <a:rPr lang="en-US" dirty="0"/>
               <a:t> </a:t>
             </a:r>
             <a:r>
-              <a:rPr lang="en-US" dirty="0" err="1" smtClean="0"/>
+              <a:rPr lang="en-US" dirty="0" err="1"/>
               <a:t>шифров</a:t>
             </a:r>
             <a:endParaRPr lang="ru-RU" dirty="0"/>
@@ -9592,7 +9430,7 @@
                   <a:buNone/>
                 </a:pPr>
                 <a:r>
-                  <a:rPr lang="en-US" dirty="0" smtClean="0"/>
+                  <a:rPr lang="en-US" dirty="0"/>
                   <a:t>Пусть </a:t>
                 </a:r>
                 <a14:m>
@@ -9639,31 +9477,31 @@
                   </m:oMath>
                 </a14:m>
                 <a:r>
-                  <a:rPr lang="en-US" dirty="0" smtClean="0"/>
+                  <a:rPr lang="en-US" dirty="0"/>
                   <a:t> – </a:t>
                 </a:r>
                 <a:r>
-                  <a:rPr lang="en-US" dirty="0" err="1" smtClean="0"/>
+                  <a:rPr lang="en-US" dirty="0" err="1"/>
                   <a:t>блочный</a:t>
                 </a:r>
                 <a:r>
-                  <a:rPr lang="en-US" dirty="0" smtClean="0"/>
+                  <a:rPr lang="en-US" dirty="0"/>
                   <a:t> </a:t>
                 </a:r>
                 <a:r>
-                  <a:rPr lang="en-US" dirty="0" err="1" smtClean="0"/>
+                  <a:rPr lang="en-US" dirty="0" err="1"/>
                   <a:t>шифр</a:t>
                 </a:r>
                 <a:r>
-                  <a:rPr lang="en-US" dirty="0" smtClean="0"/>
+                  <a:rPr lang="en-US" dirty="0"/>
                   <a:t> </a:t>
                 </a:r>
                 <a:r>
-                  <a:rPr lang="en-US" dirty="0" err="1" smtClean="0"/>
+                  <a:rPr lang="en-US" dirty="0" err="1"/>
                   <a:t>на</a:t>
                 </a:r>
                 <a:r>
-                  <a:rPr lang="en-US" dirty="0" smtClean="0"/>
+                  <a:rPr lang="en-US" dirty="0"/>
                   <a:t> </a:t>
                 </a:r>
                 <a14:m>
@@ -9701,7 +9539,7 @@
                   </m:oMath>
                 </a14:m>
                 <a:r>
-                  <a:rPr lang="en-US" dirty="0" smtClean="0"/>
+                  <a:rPr lang="en-US" dirty="0"/>
                   <a:t>.</a:t>
                 </a:r>
               </a:p>
@@ -9710,7 +9548,7 @@
                   <a:buNone/>
                 </a:pPr>
                 <a:r>
-                  <a:rPr lang="ru-RU" dirty="0" smtClean="0"/>
+                  <a:rPr lang="ru-RU" dirty="0"/>
                   <a:t>Можем ли мы использовать блочный шифр для построения шифров для сообщений произвольной длины?</a:t>
                 </a:r>
               </a:p>
@@ -9725,7 +9563,7 @@
                   <a:buNone/>
                 </a:pPr>
                 <a:r>
-                  <a:rPr lang="ru-RU" dirty="0" smtClean="0"/>
+                  <a:rPr lang="ru-RU" dirty="0"/>
                   <a:t>Сможем, будем использовать режимы шифрования блочных шифров, определяющие шифрование сообщений произвольной длины, на основе блочных шифров.</a:t>
                 </a:r>
               </a:p>
@@ -9799,13 +9637,6 @@
   <p:clrMapOvr>
     <a:masterClrMapping/>
   </p:clrMapOvr>
-  <p:timing>
-    <p:tnLst>
-      <p:par>
-        <p:cTn id="1" dur="indefinite" restart="never" nodeType="tmRoot"/>
-      </p:par>
-    </p:tnLst>
-  </p:timing>
 </p:sld>
 </file>
 
@@ -9842,10 +9673,9 @@
           <a:lstStyle/>
           <a:p>
             <a:r>
-              <a:rPr lang="ru-RU" dirty="0" smtClean="0"/>
+              <a:rPr lang="ru-RU" dirty="0"/>
               <a:t>Выполнение лабораторных работ</a:t>
             </a:r>
-            <a:endParaRPr lang="ru-RU" dirty="0"/>
           </a:p>
         </p:txBody>
       </p:sp>
@@ -9865,60 +9695,50 @@
           <a:lstStyle/>
           <a:p>
             <a:r>
-              <a:rPr lang="ru-RU" dirty="0" smtClean="0"/>
+              <a:rPr lang="ru-RU" dirty="0"/>
               <a:t>Лабораторные работы выполняются самостоятельно</a:t>
             </a:r>
           </a:p>
           <a:p>
             <a:r>
-              <a:rPr lang="ru-RU" dirty="0" smtClean="0"/>
-              <a:t>Запрещается использовать части кода, полученные из открытых источников, включая генеративные </a:t>
-            </a:r>
-            <a:r>
-              <a:rPr lang="ru-RU" dirty="0" smtClean="0"/>
-              <a:t>сети</a:t>
-            </a:r>
-            <a:endParaRPr lang="en-US" dirty="0" smtClean="0"/>
+              <a:rPr lang="ru-RU" dirty="0"/>
+              <a:t>Запрещается использовать части кода, полученные из открытых источников, включая генеративные сети</a:t>
+            </a:r>
+            <a:endParaRPr lang="en-US" dirty="0"/>
           </a:p>
           <a:p>
             <a:pPr lvl="1"/>
             <a:r>
-              <a:rPr lang="ru-RU" dirty="0" smtClean="0"/>
+              <a:rPr lang="ru-RU" dirty="0"/>
               <a:t>Пойманные на нарушении данного правила лишаются возможности сдавать лабораторные</a:t>
             </a:r>
-            <a:endParaRPr lang="ru-RU" dirty="0" smtClean="0"/>
-          </a:p>
-          <a:p>
-            <a:r>
-              <a:rPr lang="ru-RU" dirty="0" smtClean="0"/>
+          </a:p>
+          <a:p>
+            <a:r>
+              <a:rPr lang="ru-RU" dirty="0"/>
               <a:t>Запрещается распространение исходных кодов выполненной или части выполненной лабораторной работы</a:t>
             </a:r>
           </a:p>
           <a:p>
             <a:r>
-              <a:rPr lang="ru-RU" dirty="0" smtClean="0"/>
-              <a:t>На </a:t>
-            </a:r>
-            <a:r>
-              <a:rPr lang="ru-RU" dirty="0" smtClean="0"/>
-              <a:t>выполнение каждой работы 3 недели, каждые 2 недели новая лабораторная работа</a:t>
+              <a:rPr lang="ru-RU" dirty="0"/>
+              <a:t>На выполнение каждой работы 3 недели, каждые 2 недели новая лабораторная работа</a:t>
             </a:r>
           </a:p>
           <a:p>
             <a:pPr lvl="1"/>
             <a:r>
-              <a:rPr lang="ru-RU" dirty="0" smtClean="0"/>
+              <a:rPr lang="ru-RU" dirty="0"/>
               <a:t>После истечения </a:t>
             </a:r>
             <a:r>
-              <a:rPr lang="ru-RU" dirty="0" err="1" smtClean="0"/>
+              <a:rPr lang="ru-RU" dirty="0" err="1"/>
               <a:t>дедлайна</a:t>
             </a:r>
             <a:r>
-              <a:rPr lang="ru-RU" dirty="0" smtClean="0"/>
+              <a:rPr lang="ru-RU" dirty="0"/>
               <a:t> сдавать лабораторную работу нельзя</a:t>
             </a:r>
-            <a:endParaRPr lang="ru-RU" dirty="0"/>
           </a:p>
         </p:txBody>
       </p:sp>
@@ -9955,13 +9775,6 @@
   <p:clrMapOvr>
     <a:masterClrMapping/>
   </p:clrMapOvr>
-  <p:timing>
-    <p:tnLst>
-      <p:par>
-        <p:cTn id="1" dur="indefinite" restart="never" nodeType="tmRoot"/>
-      </p:par>
-    </p:tnLst>
-  </p:timing>
 </p:sld>
 </file>
 
@@ -9998,7 +9811,7 @@
           <a:lstStyle/>
           <a:p>
             <a:r>
-              <a:rPr lang="en-US" dirty="0" smtClean="0"/>
+              <a:rPr lang="en-US" dirty="0"/>
               <a:t>ECB</a:t>
             </a:r>
             <a:endParaRPr lang="ru-RU" dirty="0"/>
@@ -10026,7 +9839,7 @@
                   <a:buNone/>
                 </a:pPr>
                 <a:r>
-                  <a:rPr lang="en-US" dirty="0" smtClean="0"/>
+                  <a:rPr lang="en-US" dirty="0"/>
                   <a:t>Пусть </a:t>
                 </a:r>
                 <a14:m>
@@ -10135,23 +9948,19 @@
                   </m:oMath>
                 </a14:m>
                 <a:r>
-                  <a:rPr lang="en-US" dirty="0" smtClean="0"/>
+                  <a:rPr lang="en-US" dirty="0"/>
                   <a:t>.</a:t>
                 </a:r>
                 <a:r>
                   <a:rPr lang="ru-RU" dirty="0"/>
-                  <a:t> </a:t>
-                </a:r>
-                <a:r>
-                  <a:rPr lang="ru-RU" dirty="0" smtClean="0"/>
-                  <a:t>Для </a:t>
-                </a:r>
-                <a:r>
-                  <a:rPr lang="ru-RU" dirty="0" err="1" smtClean="0"/>
+                  <a:t> Для </a:t>
+                </a:r>
+                <a:r>
+                  <a:rPr lang="ru-RU" dirty="0" err="1"/>
                   <a:t>полиномиально</a:t>
                 </a:r>
                 <a:r>
-                  <a:rPr lang="ru-RU" dirty="0" smtClean="0"/>
+                  <a:rPr lang="ru-RU" dirty="0"/>
                   <a:t> ограниченной величины </a:t>
                 </a:r>
                 <a14:m>
@@ -10177,11 +9986,11 @@
                   </m:oMath>
                 </a14:m>
                 <a:r>
-                  <a:rPr lang="en-US" dirty="0" smtClean="0"/>
+                  <a:rPr lang="en-US" dirty="0"/>
                   <a:t> </a:t>
                 </a:r>
                 <a:r>
-                  <a:rPr lang="ru-RU" dirty="0" smtClean="0"/>
+                  <a:rPr lang="ru-RU" dirty="0"/>
                   <a:t>определим шифр </a:t>
                 </a:r>
                 <a14:m>
@@ -10285,11 +10094,11 @@
                   </m:oMath>
                 </a14:m>
                 <a:r>
-                  <a:rPr lang="en-US" dirty="0" smtClean="0"/>
+                  <a:rPr lang="en-US" dirty="0"/>
                   <a:t> </a:t>
                 </a:r>
                 <a:r>
-                  <a:rPr lang="ru-RU" dirty="0" smtClean="0"/>
+                  <a:rPr lang="ru-RU" dirty="0"/>
                   <a:t>на </a:t>
                 </a:r>
                 <a14:m>
@@ -10383,22 +10192,22 @@
                   </m:oMath>
                 </a14:m>
                 <a:r>
-                  <a:rPr lang="en-US" dirty="0" smtClean="0"/>
+                  <a:rPr lang="en-US" dirty="0"/>
                   <a:t>)</a:t>
                 </a:r>
                 <a:r>
-                  <a:rPr lang="ru-RU" dirty="0" smtClean="0"/>
+                  <a:rPr lang="ru-RU" dirty="0"/>
                   <a:t> следующим образом</a:t>
                 </a:r>
                 <a:r>
-                  <a:rPr lang="en-US" dirty="0" smtClean="0"/>
+                  <a:rPr lang="en-US" dirty="0"/>
                   <a:t>:</a:t>
                 </a:r>
-                <a:endParaRPr lang="ru-RU" dirty="0" smtClean="0"/>
+                <a:endParaRPr lang="ru-RU" dirty="0"/>
               </a:p>
               <a:p>
                 <a:r>
-                  <a:rPr lang="ru-RU" dirty="0" smtClean="0"/>
+                  <a:rPr lang="ru-RU" dirty="0"/>
                   <a:t>Для </a:t>
                 </a:r>
                 <a14:m>
@@ -10503,14 +10312,14 @@
                   </m:oMath>
                 </a14:m>
                 <a:r>
-                  <a:rPr lang="en-US" dirty="0" smtClean="0"/>
+                  <a:rPr lang="en-US" dirty="0"/>
                   <a:t> </a:t>
                 </a:r>
                 <a:r>
-                  <a:rPr lang="ru-RU" dirty="0" smtClean="0"/>
+                  <a:rPr lang="ru-RU" dirty="0"/>
                   <a:t>определим </a:t>
                 </a:r>
-                <a:endParaRPr lang="en-US" dirty="0" smtClean="0"/>
+                <a:endParaRPr lang="en-US" dirty="0"/>
               </a:p>
               <a:p>
                 <a:pPr marL="0" indent="0">
@@ -10722,7 +10531,7 @@
                     </m:oMath>
                   </m:oMathPara>
                 </a14:m>
-                <a:endParaRPr lang="en-US" dirty="0" smtClean="0"/>
+                <a:endParaRPr lang="en-US" dirty="0"/>
               </a:p>
               <a:p>
                 <a:r>
@@ -11116,13 +10925,6 @@
   <p:clrMapOvr>
     <a:masterClrMapping/>
   </p:clrMapOvr>
-  <p:timing>
-    <p:tnLst>
-      <p:par>
-        <p:cTn id="1" dur="indefinite" restart="never" nodeType="tmRoot"/>
-      </p:par>
-    </p:tnLst>
-  </p:timing>
 </p:sld>
 </file>
 
@@ -11159,10 +10961,9 @@
           <a:lstStyle/>
           <a:p>
             <a:r>
-              <a:rPr lang="ru-RU" dirty="0" smtClean="0"/>
+              <a:rPr lang="ru-RU" dirty="0"/>
               <a:t>ECB</a:t>
             </a:r>
-            <a:endParaRPr lang="ru-RU" dirty="0"/>
           </a:p>
         </p:txBody>
       </p:sp>
@@ -11260,7 +11061,7 @@
           <a:lstStyle/>
           <a:p>
             <a:r>
-              <a:rPr lang="en-US" dirty="0" err="1" smtClean="0"/>
+              <a:rPr lang="en-US" dirty="0" err="1"/>
               <a:t>Зашифрование</a:t>
             </a:r>
             <a:endParaRPr lang="ru-RU" dirty="0"/>
@@ -11290,7 +11091,7 @@
           <a:lstStyle/>
           <a:p>
             <a:r>
-              <a:rPr lang="en-US" dirty="0" err="1" smtClean="0"/>
+              <a:rPr lang="en-US" dirty="0" err="1"/>
               <a:t>Расшифрование</a:t>
             </a:r>
             <a:endParaRPr lang="ru-RU" dirty="0"/>
@@ -11307,13 +11108,6 @@
   <p:clrMapOvr>
     <a:masterClrMapping/>
   </p:clrMapOvr>
-  <p:timing>
-    <p:tnLst>
-      <p:par>
-        <p:cTn id="1" dur="indefinite" restart="never" nodeType="tmRoot"/>
-      </p:par>
-    </p:tnLst>
-  </p:timing>
 </p:sld>
 </file>
 
@@ -11358,10 +11152,9 @@
               <a:t> </a:t>
             </a:r>
             <a:r>
-              <a:rPr lang="ru-RU" dirty="0" smtClean="0"/>
+              <a:rPr lang="ru-RU" dirty="0"/>
               <a:t>ECB</a:t>
             </a:r>
-            <a:endParaRPr lang="ru-RU" dirty="0"/>
           </a:p>
         </p:txBody>
       </p:sp>
@@ -11381,52 +11174,44 @@
           <a:lstStyle/>
           <a:p>
             <a:r>
-              <a:rPr lang="ru-RU" dirty="0" smtClean="0"/>
+              <a:rPr lang="ru-RU" dirty="0"/>
               <a:t>Стойкий блочный шифр в режиме </a:t>
             </a:r>
             <a:r>
-              <a:rPr lang="en-US" dirty="0" smtClean="0"/>
+              <a:rPr lang="en-US" dirty="0"/>
               <a:t>ECB </a:t>
             </a:r>
             <a:r>
-              <a:rPr lang="ru-RU" dirty="0" smtClean="0"/>
+              <a:rPr lang="ru-RU" dirty="0"/>
               <a:t>–стойкий для</a:t>
             </a:r>
           </a:p>
           <a:p>
             <a:pPr lvl="1"/>
             <a:r>
-              <a:rPr lang="ru-RU" dirty="0" smtClean="0"/>
+              <a:rPr lang="ru-RU" dirty="0"/>
               <a:t>Сообщений, состоящих из уникальных, </a:t>
             </a:r>
             <a:r>
-              <a:rPr lang="ru-RU" b="1" dirty="0" smtClean="0"/>
+              <a:rPr lang="ru-RU" b="1" dirty="0"/>
               <a:t>попарно различных блоков </a:t>
             </a:r>
             <a:r>
-              <a:rPr lang="ru-RU" dirty="0" smtClean="0"/>
+              <a:rPr lang="ru-RU" dirty="0"/>
               <a:t>(например есть открытый текст – случайных ключ), не повторяющихся во время жизни ключа шифрования</a:t>
             </a:r>
           </a:p>
           <a:p>
             <a:pPr lvl="1"/>
             <a:r>
-              <a:rPr lang="ru-RU" dirty="0" smtClean="0"/>
+              <a:rPr lang="ru-RU" dirty="0"/>
               <a:t>Любых коротких, уникальных сообщений, длинной в один блок, не повторяющихся во время жизни ключа</a:t>
             </a:r>
           </a:p>
           <a:p>
             <a:r>
-              <a:rPr lang="ru-RU" dirty="0" smtClean="0"/>
-              <a:t>Что </a:t>
-            </a:r>
-            <a:r>
               <a:rPr lang="ru-RU" dirty="0"/>
-              <a:t>для произвольных сообщений произвольной </a:t>
-            </a:r>
-            <a:r>
-              <a:rPr lang="ru-RU" dirty="0" smtClean="0"/>
-              <a:t>длины?</a:t>
+              <a:t>Что для произвольных сообщений произвольной длины?</a:t>
             </a:r>
           </a:p>
           <a:p>
@@ -11436,13 +11221,13 @@
             <a:pPr marL="0" indent="0">
               <a:buNone/>
             </a:pPr>
-            <a:endParaRPr lang="ru-RU" dirty="0" smtClean="0"/>
-          </a:p>
-          <a:p>
-            <a:endParaRPr lang="ru-RU" dirty="0" smtClean="0"/>
-          </a:p>
-          <a:p>
-            <a:endParaRPr lang="ru-RU" dirty="0" smtClean="0"/>
+            <a:endParaRPr lang="ru-RU" dirty="0"/>
+          </a:p>
+          <a:p>
+            <a:endParaRPr lang="ru-RU" dirty="0"/>
+          </a:p>
+          <a:p>
+            <a:endParaRPr lang="ru-RU" dirty="0"/>
           </a:p>
           <a:p>
             <a:endParaRPr lang="ru-RU" dirty="0"/>
@@ -11485,13 +11270,6 @@
   <p:clrMapOvr>
     <a:masterClrMapping/>
   </p:clrMapOvr>
-  <p:timing>
-    <p:tnLst>
-      <p:par>
-        <p:cTn id="1" dur="indefinite" restart="never" nodeType="tmRoot"/>
-      </p:par>
-    </p:tnLst>
-  </p:timing>
 </p:sld>
 </file>
 
@@ -11528,11 +11306,11 @@
           <a:lstStyle/>
           <a:p>
             <a:r>
-              <a:rPr lang="ru-RU" dirty="0" smtClean="0"/>
+              <a:rPr lang="ru-RU" dirty="0"/>
               <a:t>Стойкость </a:t>
             </a:r>
             <a:r>
-              <a:rPr lang="en-US" dirty="0" smtClean="0"/>
+              <a:rPr lang="en-US" dirty="0"/>
               <a:t>ECB</a:t>
             </a:r>
             <a:endParaRPr lang="ru-RU" dirty="0"/>
@@ -11565,30 +11343,29 @@
               <a:buNone/>
             </a:pPr>
             <a:r>
-              <a:rPr lang="ru-RU" dirty="0" err="1" smtClean="0"/>
+              <a:rPr lang="ru-RU" dirty="0" err="1"/>
               <a:t>Зашифрование</a:t>
             </a:r>
             <a:r>
-              <a:rPr lang="ru-RU" dirty="0" smtClean="0"/>
+              <a:rPr lang="ru-RU" dirty="0"/>
               <a:t> в режиме </a:t>
             </a:r>
             <a:r>
-              <a:rPr lang="en-US" dirty="0" smtClean="0"/>
+              <a:rPr lang="en-US" dirty="0"/>
               <a:t>ECB</a:t>
             </a:r>
             <a:r>
-              <a:rPr lang="ru-RU" dirty="0" smtClean="0"/>
+              <a:rPr lang="ru-RU" dirty="0"/>
               <a:t> происходит детерминировано и </a:t>
             </a:r>
             <a:r>
-              <a:rPr lang="ru-RU" dirty="0" err="1" smtClean="0"/>
+              <a:rPr lang="ru-RU" dirty="0" err="1"/>
               <a:t>поблочно</a:t>
             </a:r>
             <a:r>
-              <a:rPr lang="ru-RU" dirty="0" smtClean="0"/>
+              <a:rPr lang="ru-RU" dirty="0"/>
               <a:t>, как следствие одинаковые блоки имеют одинаковый шифртекст.</a:t>
             </a:r>
-            <a:endParaRPr lang="ru-RU" dirty="0"/>
           </a:p>
         </p:txBody>
       </p:sp>
@@ -12936,13 +12713,6 @@
   <p:clrMapOvr>
     <a:masterClrMapping/>
   </p:clrMapOvr>
-  <p:timing>
-    <p:tnLst>
-      <p:par>
-        <p:cTn id="1" dur="indefinite" restart="never" nodeType="tmRoot"/>
-      </p:par>
-    </p:tnLst>
-  </p:timing>
 </p:sld>
 </file>
 
@@ -13047,13 +12817,6 @@
   <p:clrMapOvr>
     <a:masterClrMapping/>
   </p:clrMapOvr>
-  <p:timing>
-    <p:tnLst>
-      <p:par>
-        <p:cTn id="1" dur="indefinite" restart="never" nodeType="tmRoot"/>
-      </p:par>
-    </p:tnLst>
-  </p:timing>
 </p:sld>
 </file>
 
@@ -13177,13 +12940,6 @@
   <p:clrMapOvr>
     <a:masterClrMapping/>
   </p:clrMapOvr>
-  <p:timing>
-    <p:tnLst>
-      <p:par>
-        <p:cTn id="1" dur="indefinite" restart="never" nodeType="tmRoot"/>
-      </p:par>
-    </p:tnLst>
-  </p:timing>
 </p:sld>
 </file>
 
@@ -13220,18 +12976,17 @@
           <a:lstStyle/>
           <a:p>
             <a:r>
-              <a:rPr lang="ru-RU" dirty="0" smtClean="0"/>
+              <a:rPr lang="ru-RU" dirty="0"/>
               <a:t>Вопросы для достижения </a:t>
             </a:r>
             <a:r>
-              <a:rPr lang="ru-RU" dirty="0" err="1" smtClean="0"/>
+              <a:rPr lang="ru-RU" dirty="0" err="1"/>
               <a:t>дзена</a:t>
             </a:r>
             <a:r>
-              <a:rPr lang="ru-RU" dirty="0" smtClean="0"/>
+              <a:rPr lang="ru-RU" dirty="0"/>
               <a:t> в режимах шифрования</a:t>
             </a:r>
-            <a:endParaRPr lang="ru-RU" dirty="0"/>
           </a:p>
         </p:txBody>
       </p:sp>
@@ -13254,32 +13009,32 @@
               <a:buNone/>
             </a:pPr>
             <a:r>
-              <a:rPr lang="ru-RU" dirty="0" smtClean="0"/>
+              <a:rPr lang="ru-RU" dirty="0"/>
               <a:t>На сколько битов, в каких блоках и каким образов влияет </a:t>
             </a:r>
           </a:p>
           <a:p>
             <a:r>
-              <a:rPr lang="ru-RU" dirty="0" smtClean="0"/>
+              <a:rPr lang="ru-RU" dirty="0"/>
               <a:t>Изменение одного бита открытого текста на </a:t>
             </a:r>
             <a:r>
-              <a:rPr lang="ru-RU" dirty="0" err="1" smtClean="0"/>
+              <a:rPr lang="ru-RU" dirty="0" err="1"/>
               <a:t>шифртекст</a:t>
             </a:r>
-            <a:endParaRPr lang="ru-RU" dirty="0" smtClean="0"/>
-          </a:p>
-          <a:p>
-            <a:r>
-              <a:rPr lang="ru-RU" dirty="0" smtClean="0"/>
+            <a:endParaRPr lang="ru-RU" dirty="0"/>
+          </a:p>
+          <a:p>
+            <a:r>
+              <a:rPr lang="ru-RU" dirty="0"/>
               <a:t>Изменение одного бита </a:t>
             </a:r>
             <a:r>
-              <a:rPr lang="ru-RU" dirty="0" err="1" smtClean="0"/>
+              <a:rPr lang="ru-RU" dirty="0" err="1"/>
               <a:t>шифртекста</a:t>
             </a:r>
             <a:r>
-              <a:rPr lang="ru-RU" dirty="0" smtClean="0"/>
+              <a:rPr lang="ru-RU" dirty="0"/>
               <a:t> на расшифрованный открытый текст</a:t>
             </a:r>
           </a:p>
@@ -13287,25 +13042,24 @@
             <a:pPr marL="0" indent="0">
               <a:buNone/>
             </a:pPr>
-            <a:endParaRPr lang="ru-RU" dirty="0" smtClean="0"/>
+            <a:endParaRPr lang="ru-RU" dirty="0"/>
           </a:p>
           <a:p>
             <a:pPr marL="0" indent="0">
               <a:buNone/>
             </a:pPr>
             <a:r>
-              <a:rPr lang="ru-RU" dirty="0" smtClean="0"/>
+              <a:rPr lang="ru-RU" dirty="0"/>
               <a:t>Можно ли контролируемо изменить определённый бит расшифрованного открытого текста, изменив биты </a:t>
             </a:r>
             <a:r>
-              <a:rPr lang="ru-RU" dirty="0" err="1" smtClean="0"/>
+              <a:rPr lang="ru-RU" dirty="0" err="1"/>
               <a:t>шифртекста</a:t>
             </a:r>
             <a:r>
-              <a:rPr lang="ru-RU" dirty="0" smtClean="0"/>
+              <a:rPr lang="ru-RU" dirty="0"/>
               <a:t>, как?</a:t>
             </a:r>
-            <a:endParaRPr lang="ru-RU" dirty="0"/>
           </a:p>
         </p:txBody>
       </p:sp>
@@ -13342,13 +13096,6 @@
   <p:clrMapOvr>
     <a:masterClrMapping/>
   </p:clrMapOvr>
-  <p:timing>
-    <p:tnLst>
-      <p:par>
-        <p:cTn id="1" dur="indefinite" restart="never" nodeType="tmRoot"/>
-      </p:par>
-    </p:tnLst>
-  </p:timing>
 </p:sld>
 </file>
 
@@ -13385,7 +13132,7 @@
           <a:lstStyle/>
           <a:p>
             <a:r>
-              <a:rPr lang="en-US" dirty="0" smtClean="0"/>
+              <a:rPr lang="en-US" dirty="0"/>
               <a:t>ECB</a:t>
             </a:r>
             <a:endParaRPr lang="ru-RU" dirty="0"/>
@@ -13484,13 +13231,6 @@
   <p:clrMapOvr>
     <a:masterClrMapping/>
   </p:clrMapOvr>
-  <p:timing>
-    <p:tnLst>
-      <p:par>
-        <p:cTn id="1" dur="indefinite" restart="never" nodeType="tmRoot"/>
-      </p:par>
-    </p:tnLst>
-  </p:timing>
 </p:sld>
 </file>
 
@@ -13527,7 +13267,7 @@
           <a:lstStyle/>
           <a:p>
             <a:r>
-              <a:rPr lang="en-US" dirty="0" smtClean="0"/>
+              <a:rPr lang="en-US" dirty="0"/>
               <a:t>CBC</a:t>
             </a:r>
             <a:endParaRPr lang="ru-RU" dirty="0"/>
@@ -13626,13 +13366,6 @@
   <p:clrMapOvr>
     <a:masterClrMapping/>
   </p:clrMapOvr>
-  <p:timing>
-    <p:tnLst>
-      <p:par>
-        <p:cTn id="1" dur="indefinite" restart="never" nodeType="tmRoot"/>
-      </p:par>
-    </p:tnLst>
-  </p:timing>
 </p:sld>
 </file>
 
@@ -13669,7 +13402,7 @@
           <a:lstStyle/>
           <a:p>
             <a:r>
-              <a:rPr lang="en-US" dirty="0" smtClean="0"/>
+              <a:rPr lang="en-US" dirty="0"/>
               <a:t>CFB</a:t>
             </a:r>
             <a:endParaRPr lang="ru-RU" dirty="0"/>
@@ -13768,13 +13501,6 @@
   <p:clrMapOvr>
     <a:masterClrMapping/>
   </p:clrMapOvr>
-  <p:timing>
-    <p:tnLst>
-      <p:par>
-        <p:cTn id="1" dur="indefinite" restart="never" nodeType="tmRoot"/>
-      </p:par>
-    </p:tnLst>
-  </p:timing>
 </p:sld>
 </file>
 
@@ -13811,10 +13537,9 @@
           <a:lstStyle/>
           <a:p>
             <a:r>
-              <a:rPr lang="ru-RU" dirty="0" smtClean="0"/>
+              <a:rPr lang="ru-RU" dirty="0"/>
               <a:t>Выполнение лабораторных работ</a:t>
             </a:r>
-            <a:endParaRPr lang="ru-RU" dirty="0"/>
           </a:p>
         </p:txBody>
       </p:sp>
@@ -13841,88 +13566,86 @@
           <a:lstStyle/>
           <a:p>
             <a:r>
-              <a:rPr lang="ru-RU" dirty="0" smtClean="0"/>
+              <a:rPr lang="ru-RU" dirty="0"/>
               <a:t>Лабораторная работа должна быть загружена в соответствующий </a:t>
             </a:r>
             <a:r>
-              <a:rPr lang="ru-RU" dirty="0" err="1" smtClean="0"/>
+              <a:rPr lang="ru-RU" dirty="0" err="1"/>
               <a:t>репозиторий</a:t>
             </a:r>
-            <a:endParaRPr lang="ru-RU" dirty="0" smtClean="0"/>
-          </a:p>
-          <a:p>
-            <a:r>
-              <a:rPr lang="ru-RU" dirty="0" smtClean="0"/>
+            <a:endParaRPr lang="ru-RU" dirty="0"/>
+          </a:p>
+          <a:p>
+            <a:r>
+              <a:rPr lang="ru-RU" dirty="0"/>
               <a:t>После загрузки лабораторной работы необходимо написать мне для проверки работы</a:t>
             </a:r>
           </a:p>
           <a:p>
             <a:pPr lvl="1"/>
             <a:r>
-              <a:rPr lang="ru-RU" dirty="0" smtClean="0"/>
+              <a:rPr lang="ru-RU" dirty="0"/>
               <a:t>Результат проверки удовлетворительный – получаете оценку</a:t>
             </a:r>
           </a:p>
           <a:p>
             <a:pPr lvl="1"/>
             <a:r>
-              <a:rPr lang="ru-RU" dirty="0" smtClean="0"/>
+              <a:rPr lang="ru-RU" dirty="0"/>
               <a:t>Результат неудовлетворительный – получаете список исправлений для внесения, после чего загружаете изменения и вновь пишите мне для проверки</a:t>
             </a:r>
-            <a:endParaRPr lang="ru-RU" dirty="0"/>
-          </a:p>
-          <a:p>
-            <a:r>
-              <a:rPr lang="ru-RU" dirty="0" smtClean="0"/>
+          </a:p>
+          <a:p>
+            <a:r>
+              <a:rPr lang="ru-RU" dirty="0"/>
               <a:t>Не загружать в </a:t>
             </a:r>
             <a:r>
-              <a:rPr lang="ru-RU" dirty="0" err="1" smtClean="0"/>
+              <a:rPr lang="ru-RU" dirty="0" err="1"/>
               <a:t>репозиторий</a:t>
             </a:r>
             <a:r>
-              <a:rPr lang="ru-RU" dirty="0" smtClean="0"/>
+              <a:rPr lang="ru-RU" dirty="0"/>
               <a:t> файлы, не относящиеся к исходным кодам </a:t>
             </a:r>
             <a:r>
-              <a:rPr lang="ru-RU" dirty="0" err="1" smtClean="0"/>
+              <a:rPr lang="ru-RU" dirty="0" err="1"/>
               <a:t>выполенной</a:t>
             </a:r>
             <a:r>
-              <a:rPr lang="ru-RU" dirty="0" smtClean="0"/>
+              <a:rPr lang="ru-RU" dirty="0"/>
               <a:t> работы</a:t>
             </a:r>
           </a:p>
           <a:p>
             <a:pPr lvl="1"/>
             <a:r>
-              <a:rPr lang="ru-RU" dirty="0" smtClean="0"/>
+              <a:rPr lang="ru-RU" dirty="0"/>
               <a:t>Не загружать бинарные файлы! Только файлы с исходным кодом!</a:t>
             </a:r>
           </a:p>
           <a:p>
             <a:pPr lvl="1"/>
             <a:r>
-              <a:rPr lang="ru-RU" dirty="0" smtClean="0"/>
+              <a:rPr lang="ru-RU" dirty="0"/>
               <a:t>Рекомендуется использование </a:t>
             </a:r>
             <a:r>
-              <a:rPr lang="en-US" dirty="0" smtClean="0"/>
+              <a:rPr lang="en-US" dirty="0"/>
               <a:t>.</a:t>
             </a:r>
             <a:r>
-              <a:rPr lang="en-US" dirty="0" err="1" smtClean="0"/>
+              <a:rPr lang="en-US" dirty="0" err="1"/>
               <a:t>gitignore</a:t>
             </a:r>
-            <a:endParaRPr lang="en-US" dirty="0" smtClean="0"/>
+            <a:endParaRPr lang="en-US" dirty="0"/>
           </a:p>
           <a:p>
             <a:pPr lvl="1"/>
             <a:r>
-              <a:rPr lang="ru-RU" dirty="0" smtClean="0"/>
+              <a:rPr lang="ru-RU" dirty="0"/>
               <a:t>Если вы всё же загрузили бинарный файл – написать мне, не удалять самостоятельно (ибо нужно удалить из истории)!</a:t>
             </a:r>
-            <a:endParaRPr lang="ru-RU" dirty="0"/>
           </a:p>
         </p:txBody>
       </p:sp>
@@ -13959,13 +13682,6 @@
   <p:clrMapOvr>
     <a:masterClrMapping/>
   </p:clrMapOvr>
-  <p:timing>
-    <p:tnLst>
-      <p:par>
-        <p:cTn id="1" dur="indefinite" restart="never" nodeType="tmRoot"/>
-      </p:par>
-    </p:tnLst>
-  </p:timing>
 </p:sld>
 </file>
 
@@ -14002,7 +13718,7 @@
           <a:lstStyle/>
           <a:p>
             <a:r>
-              <a:rPr lang="en-US" dirty="0" smtClean="0"/>
+              <a:rPr lang="en-US" dirty="0"/>
               <a:t>OFB</a:t>
             </a:r>
             <a:endParaRPr lang="ru-RU" dirty="0"/>
@@ -14101,13 +13817,6 @@
   <p:clrMapOvr>
     <a:masterClrMapping/>
   </p:clrMapOvr>
-  <p:timing>
-    <p:tnLst>
-      <p:par>
-        <p:cTn id="1" dur="indefinite" restart="never" nodeType="tmRoot"/>
-      </p:par>
-    </p:tnLst>
-  </p:timing>
 </p:sld>
 </file>
 
@@ -14144,7 +13853,7 @@
           <a:lstStyle/>
           <a:p>
             <a:r>
-              <a:rPr lang="en-US" dirty="0" smtClean="0"/>
+              <a:rPr lang="en-US" dirty="0"/>
               <a:t>CTR</a:t>
             </a:r>
             <a:endParaRPr lang="ru-RU" dirty="0"/>
@@ -14243,13 +13952,6 @@
   <p:clrMapOvr>
     <a:masterClrMapping/>
   </p:clrMapOvr>
-  <p:timing>
-    <p:tnLst>
-      <p:par>
-        <p:cTn id="1" dur="indefinite" restart="never" nodeType="tmRoot"/>
-      </p:par>
-    </p:tnLst>
-  </p:timing>
 </p:sld>
 </file>
 
@@ -14286,10 +13988,9 @@
           <a:lstStyle/>
           <a:p>
             <a:r>
-              <a:rPr lang="ru-RU" dirty="0" smtClean="0"/>
+              <a:rPr lang="ru-RU" dirty="0"/>
               <a:t>Безопасное программирование</a:t>
             </a:r>
-            <a:endParaRPr lang="ru-RU" dirty="0"/>
           </a:p>
         </p:txBody>
       </p:sp>
@@ -14314,49 +14015,49 @@
           <a:lstStyle/>
           <a:p>
             <a:r>
-              <a:rPr lang="ru-RU" dirty="0" smtClean="0"/>
+              <a:rPr lang="ru-RU" dirty="0"/>
               <a:t>Проверка входных значений (длины входов, типы, корректность)</a:t>
             </a:r>
           </a:p>
           <a:p>
             <a:pPr lvl="1"/>
             <a:r>
-              <a:rPr lang="ru-RU" dirty="0" smtClean="0"/>
+              <a:rPr lang="ru-RU" dirty="0"/>
               <a:t>Должна производиться по возможности в начале функции</a:t>
             </a:r>
           </a:p>
           <a:p>
             <a:pPr lvl="1"/>
             <a:r>
-              <a:rPr lang="ru-RU" dirty="0" err="1" smtClean="0"/>
+              <a:rPr lang="ru-RU" dirty="0" err="1"/>
               <a:t>Параноидальные</a:t>
             </a:r>
             <a:r>
-              <a:rPr lang="ru-RU" dirty="0" smtClean="0"/>
+              <a:rPr lang="ru-RU" dirty="0"/>
               <a:t> проверки</a:t>
             </a:r>
           </a:p>
           <a:p>
             <a:r>
-              <a:rPr lang="ru-RU" dirty="0" smtClean="0"/>
+              <a:rPr lang="ru-RU" dirty="0"/>
               <a:t>Криптографические методы должны быть вынесены в отдельные функции и модули</a:t>
             </a:r>
           </a:p>
           <a:p>
             <a:r>
-              <a:rPr lang="ru-RU" dirty="0" smtClean="0"/>
+              <a:rPr lang="ru-RU" dirty="0"/>
               <a:t>Все внешние криптографические интерфейсы работают только с массивом байт</a:t>
             </a:r>
           </a:p>
           <a:p>
             <a:r>
-              <a:rPr lang="ru-RU" dirty="0" smtClean="0"/>
+              <a:rPr lang="ru-RU" dirty="0"/>
               <a:t>Не использование «магических чисел» – все константы должны быть определены</a:t>
             </a:r>
           </a:p>
           <a:p>
             <a:r>
-              <a:rPr lang="ru-RU" dirty="0" smtClean="0"/>
+              <a:rPr lang="ru-RU" dirty="0"/>
               <a:t>Не использовать «алгоритмы по умолчанию», т.е. явно задавать алгоритмы шифрования через параметры</a:t>
             </a:r>
           </a:p>
@@ -14395,13 +14096,6 @@
   <p:clrMapOvr>
     <a:masterClrMapping/>
   </p:clrMapOvr>
-  <p:timing>
-    <p:tnLst>
-      <p:par>
-        <p:cTn id="1" dur="indefinite" restart="never" nodeType="tmRoot"/>
-      </p:par>
-    </p:tnLst>
-  </p:timing>
 </p:sld>
 </file>
 
@@ -14438,10 +14132,9 @@
           <a:lstStyle/>
           <a:p>
             <a:r>
-              <a:rPr lang="ru-RU" dirty="0" smtClean="0"/>
+              <a:rPr lang="ru-RU" dirty="0"/>
               <a:t>Проверка входных данных</a:t>
             </a:r>
-            <a:endParaRPr lang="ru-RU" dirty="0"/>
           </a:p>
         </p:txBody>
       </p:sp>
@@ -14467,22 +14160,18 @@
             </a:pPr>
             <a:r>
               <a:rPr lang="en-US" dirty="0" err="1"/>
-              <a:t>d</a:t>
-            </a:r>
-            <a:r>
-              <a:rPr lang="en-US" dirty="0" err="1" smtClean="0"/>
-              <a:t>ef</a:t>
-            </a:r>
-            <a:r>
-              <a:rPr lang="en-US" dirty="0" smtClean="0"/>
+              <a:t>def</a:t>
+            </a:r>
+            <a:r>
+              <a:rPr lang="en-US" dirty="0"/>
               <a:t> decrypt(key, data, </a:t>
             </a:r>
             <a:r>
-              <a:rPr lang="en-US" dirty="0" err="1" smtClean="0"/>
+              <a:rPr lang="en-US" dirty="0" err="1"/>
               <a:t>cipher_suite</a:t>
             </a:r>
             <a:r>
-              <a:rPr lang="en-US" dirty="0" smtClean="0"/>
+              <a:rPr lang="en-US" dirty="0"/>
               <a:t>):</a:t>
             </a:r>
           </a:p>
@@ -14492,60 +14181,15 @@
             </a:pPr>
             <a:r>
               <a:rPr lang="en-US" dirty="0"/>
-              <a:t>	</a:t>
-            </a:r>
-            <a:r>
-              <a:rPr lang="en-US" dirty="0" smtClean="0"/>
-              <a:t>if </a:t>
-            </a:r>
-            <a:r>
-              <a:rPr lang="en-US" dirty="0" err="1" smtClean="0"/>
+              <a:t>	if </a:t>
+            </a:r>
+            <a:r>
+              <a:rPr lang="en-US" dirty="0" err="1"/>
               <a:t>len</a:t>
             </a:r>
             <a:r>
-              <a:rPr lang="en-US" dirty="0" smtClean="0"/>
+              <a:rPr lang="en-US" dirty="0"/>
               <a:t>(key) != </a:t>
-            </a:r>
-            <a:r>
-              <a:rPr lang="en-US" dirty="0" smtClean="0">
-                <a:solidFill>
-                  <a:srgbClr val="FF0000"/>
-                </a:solidFill>
-              </a:rPr>
-              <a:t>AES_KEY_SIZE</a:t>
-            </a:r>
-            <a:r>
-              <a:rPr lang="en-US" dirty="0" smtClean="0"/>
-              <a:t>:</a:t>
-            </a:r>
-          </a:p>
-          <a:p>
-            <a:pPr marL="0" indent="0">
-              <a:buNone/>
-            </a:pPr>
-            <a:r>
-              <a:rPr lang="en-US" dirty="0"/>
-              <a:t>	</a:t>
-            </a:r>
-            <a:r>
-              <a:rPr lang="en-US" dirty="0" smtClean="0"/>
-              <a:t>	</a:t>
-            </a:r>
-            <a:r>
-              <a:rPr lang="en-US" dirty="0"/>
-              <a:t>raise Exception</a:t>
-            </a:r>
-            <a:r>
-              <a:rPr lang="en-US" dirty="0" smtClean="0"/>
-              <a:t>($‘</a:t>
-            </a:r>
-            <a:r>
-              <a:rPr lang="en-US" dirty="0"/>
-              <a:t>invalid </a:t>
-            </a:r>
-            <a:r>
-              <a:rPr lang="en-US" dirty="0" smtClean="0"/>
-              <a:t>key size, expecting {</a:t>
             </a:r>
             <a:r>
               <a:rPr lang="en-US" dirty="0">
@@ -14556,8 +14200,8 @@
               <a:t>AES_KEY_SIZE</a:t>
             </a:r>
             <a:r>
-              <a:rPr lang="en-US" dirty="0" smtClean="0"/>
-              <a:t>}’)</a:t>
+              <a:rPr lang="en-US" dirty="0"/>
+              <a:t>:</a:t>
             </a:r>
           </a:p>
           <a:p>
@@ -14565,19 +14209,40 @@
               <a:buNone/>
             </a:pPr>
             <a:r>
-              <a:rPr lang="en-US" dirty="0" smtClean="0"/>
+              <a:rPr lang="en-US" dirty="0"/>
+              <a:t>		raise Exception($‘invalid key size, expecting {</a:t>
+            </a:r>
+            <a:r>
+              <a:rPr lang="en-US" dirty="0">
+                <a:solidFill>
+                  <a:srgbClr val="FF0000"/>
+                </a:solidFill>
+              </a:rPr>
+              <a:t>AES_KEY_SIZE</a:t>
+            </a:r>
+            <a:r>
+              <a:rPr lang="en-US" dirty="0"/>
+              <a:t>}’)</a:t>
+            </a:r>
+          </a:p>
+          <a:p>
+            <a:pPr marL="0" indent="0">
+              <a:buNone/>
+            </a:pPr>
+            <a:r>
+              <a:rPr lang="en-US" dirty="0"/>
               <a:t>	if </a:t>
             </a:r>
             <a:r>
-              <a:rPr lang="en-US" dirty="0" err="1" smtClean="0"/>
+              <a:rPr lang="en-US" dirty="0" err="1"/>
               <a:t>len</a:t>
             </a:r>
             <a:r>
-              <a:rPr lang="en-US" dirty="0" smtClean="0"/>
+              <a:rPr lang="en-US" dirty="0"/>
               <a:t>(data) &lt; </a:t>
             </a:r>
             <a:r>
-              <a:rPr lang="en-US" dirty="0" smtClean="0">
+              <a:rPr lang="en-US" dirty="0">
                 <a:solidFill>
                   <a:srgbClr val="FF0000"/>
                 </a:solidFill>
@@ -14585,7 +14250,7 @@
               <a:t>NONCE_SIZE</a:t>
             </a:r>
             <a:r>
-              <a:rPr lang="en-US" dirty="0" smtClean="0"/>
+              <a:rPr lang="en-US" dirty="0"/>
               <a:t>:</a:t>
             </a:r>
           </a:p>
@@ -14595,18 +14260,14 @@
             </a:pPr>
             <a:r>
               <a:rPr lang="en-US" dirty="0"/>
-              <a:t>	</a:t>
-            </a:r>
-            <a:r>
-              <a:rPr lang="en-US" dirty="0" smtClean="0"/>
-              <a:t>	raise Exception(‘invalid </a:t>
-            </a:r>
-            <a:r>
-              <a:rPr lang="en-US" dirty="0" err="1" smtClean="0"/>
+              <a:t>		raise Exception(‘invalid </a:t>
+            </a:r>
+            <a:r>
+              <a:rPr lang="en-US" dirty="0" err="1"/>
               <a:t>ciphertext</a:t>
             </a:r>
             <a:r>
-              <a:rPr lang="en-US" dirty="0" smtClean="0"/>
+              <a:rPr lang="en-US" dirty="0"/>
               <a:t> length’)</a:t>
             </a:r>
           </a:p>
@@ -14616,22 +14277,18 @@
             </a:pPr>
             <a:r>
               <a:rPr lang="en-US" dirty="0"/>
-              <a:t>	</a:t>
-            </a:r>
-            <a:r>
-              <a:rPr lang="en-US" dirty="0" smtClean="0"/>
-              <a:t>if </a:t>
-            </a:r>
-            <a:r>
-              <a:rPr lang="en-US" dirty="0" err="1" smtClean="0"/>
+              <a:t>	if </a:t>
+            </a:r>
+            <a:r>
+              <a:rPr lang="en-US" dirty="0" err="1"/>
               <a:t>cipher_suite</a:t>
             </a:r>
             <a:r>
-              <a:rPr lang="en-US" dirty="0" smtClean="0"/>
+              <a:rPr lang="en-US" dirty="0"/>
               <a:t> = </a:t>
             </a:r>
             <a:r>
-              <a:rPr lang="en-US" dirty="0" smtClean="0">
+              <a:rPr lang="en-US" dirty="0">
                 <a:solidFill>
                   <a:srgbClr val="FF0000"/>
                 </a:solidFill>
@@ -14639,7 +14296,7 @@
               <a:t>AES_CBC_WITH_CBC_MAC</a:t>
             </a:r>
             <a:r>
-              <a:rPr lang="en-US" dirty="0" smtClean="0"/>
+              <a:rPr lang="en-US" dirty="0"/>
               <a:t>:</a:t>
             </a:r>
           </a:p>
@@ -14649,27 +14306,15 @@
             </a:pPr>
             <a:r>
               <a:rPr lang="en-US" dirty="0"/>
-              <a:t>	</a:t>
-            </a:r>
-            <a:r>
-              <a:rPr lang="en-US" dirty="0" smtClean="0"/>
-              <a:t>	return </a:t>
-            </a:r>
-            <a:r>
-              <a:rPr lang="en-US" dirty="0" err="1" smtClean="0"/>
+              <a:t>		return </a:t>
+            </a:r>
+            <a:r>
+              <a:rPr lang="en-US" dirty="0" err="1"/>
               <a:t>aes.cbc.decrypt</a:t>
             </a:r>
             <a:r>
-              <a:rPr lang="en-US" dirty="0" smtClean="0"/>
-              <a:t>(key</a:t>
-            </a:r>
-            <a:r>
               <a:rPr lang="en-US" dirty="0"/>
-              <a:t>, </a:t>
-            </a:r>
-            <a:r>
-              <a:rPr lang="en-US" dirty="0" smtClean="0"/>
-              <a:t>data)</a:t>
+              <a:t>(key, data)</a:t>
             </a:r>
           </a:p>
           <a:p>
@@ -14678,11 +14323,7 @@
             </a:pPr>
             <a:r>
               <a:rPr lang="en-US" dirty="0"/>
-              <a:t>	</a:t>
-            </a:r>
-            <a:r>
-              <a:rPr lang="en-US" dirty="0" smtClean="0"/>
-              <a:t>else if </a:t>
+              <a:t>	else if </a:t>
             </a:r>
             <a:r>
               <a:rPr lang="en-US" dirty="0" err="1"/>
@@ -14693,7 +14334,7 @@
               <a:t> = </a:t>
             </a:r>
             <a:r>
-              <a:rPr lang="en-US" dirty="0" smtClean="0">
+              <a:rPr lang="en-US" dirty="0">
                 <a:solidFill>
                   <a:srgbClr val="FF0000"/>
                 </a:solidFill>
@@ -14701,25 +14342,24 @@
               <a:t>AES_CTR_WITH_CBC_MAC</a:t>
             </a:r>
             <a:r>
-              <a:rPr lang="en-US" dirty="0" smtClean="0"/>
+              <a:rPr lang="en-US" dirty="0"/>
               <a:t> :</a:t>
             </a:r>
-            <a:endParaRPr lang="en-US" dirty="0"/>
           </a:p>
           <a:p>
             <a:pPr marL="0" indent="0">
               <a:buNone/>
             </a:pPr>
             <a:r>
-              <a:rPr lang="en-US" dirty="0" smtClean="0"/>
+              <a:rPr lang="en-US" dirty="0"/>
               <a:t>		return </a:t>
             </a:r>
             <a:r>
-              <a:rPr lang="en-US" dirty="0" err="1" smtClean="0"/>
+              <a:rPr lang="en-US" dirty="0" err="1"/>
               <a:t>aes.ctr.decrypt</a:t>
             </a:r>
             <a:r>
-              <a:rPr lang="en-US" dirty="0" smtClean="0"/>
+              <a:rPr lang="en-US" dirty="0"/>
               <a:t>(key, data)</a:t>
             </a:r>
           </a:p>
@@ -14728,7 +14368,7 @@
               <a:buNone/>
             </a:pPr>
             <a:r>
-              <a:rPr lang="en-US" dirty="0" smtClean="0"/>
+              <a:rPr lang="en-US" dirty="0"/>
               <a:t>	else:</a:t>
             </a:r>
           </a:p>
@@ -14738,19 +14378,7 @@
             </a:pPr>
             <a:r>
               <a:rPr lang="en-US" dirty="0"/>
-              <a:t>	</a:t>
-            </a:r>
-            <a:r>
-              <a:rPr lang="en-US" dirty="0" smtClean="0"/>
-              <a:t>	</a:t>
-            </a:r>
-            <a:r>
-              <a:rPr lang="en-US" dirty="0"/>
-              <a:t>raise Exception</a:t>
-            </a:r>
-            <a:r>
-              <a:rPr lang="en-US" dirty="0" smtClean="0"/>
-              <a:t>($‘</a:t>
+              <a:t>		raise Exception($‘</a:t>
             </a:r>
             <a:r>
               <a:rPr lang="en-US" dirty="0" err="1"/>
@@ -14758,21 +14386,16 @@
             </a:r>
             <a:r>
               <a:rPr lang="en-US" dirty="0"/>
-              <a:t> </a:t>
-            </a:r>
-            <a:r>
-              <a:rPr lang="en-US" dirty="0" smtClean="0"/>
-              <a:t>{</a:t>
+              <a:t> {</a:t>
             </a:r>
             <a:r>
               <a:rPr lang="en-US" dirty="0" err="1"/>
               <a:t>cipher_suite</a:t>
             </a:r>
             <a:r>
-              <a:rPr lang="en-US" dirty="0" smtClean="0"/>
+              <a:rPr lang="en-US" dirty="0"/>
               <a:t>} is not supported’)</a:t>
             </a:r>
-            <a:endParaRPr lang="en-US" dirty="0"/>
           </a:p>
           <a:p>
             <a:pPr marL="0" indent="0">
@@ -14815,13 +14438,6 @@
   <p:clrMapOvr>
     <a:masterClrMapping/>
   </p:clrMapOvr>
-  <p:timing>
-    <p:tnLst>
-      <p:par>
-        <p:cTn id="1" dur="indefinite" restart="never" nodeType="tmRoot"/>
-      </p:par>
-    </p:tnLst>
-  </p:timing>
 </p:sld>
 </file>
 
@@ -14858,10 +14474,9 @@
           <a:lstStyle/>
           <a:p>
             <a:r>
-              <a:rPr lang="ru-RU" dirty="0" smtClean="0"/>
+              <a:rPr lang="ru-RU" dirty="0"/>
               <a:t>Отдельные функции, работа только с массивом байт</a:t>
             </a:r>
-            <a:endParaRPr lang="ru-RU" dirty="0"/>
           </a:p>
         </p:txBody>
       </p:sp>
@@ -14886,23 +14501,23 @@
               <a:buNone/>
             </a:pPr>
             <a:r>
-              <a:rPr lang="en-US" dirty="0" err="1" smtClean="0"/>
+              <a:rPr lang="en-US" dirty="0" err="1"/>
               <a:t>def</a:t>
             </a:r>
             <a:r>
-              <a:rPr lang="en-US" dirty="0" smtClean="0"/>
+              <a:rPr lang="en-US" dirty="0"/>
               <a:t> generate</a:t>
             </a:r>
             <a:r>
-              <a:rPr lang="ru-RU" dirty="0" smtClean="0"/>
+              <a:rPr lang="ru-RU" dirty="0"/>
               <a:t>_</a:t>
             </a:r>
             <a:r>
-              <a:rPr lang="en-US" dirty="0" err="1" smtClean="0"/>
+              <a:rPr lang="en-US" dirty="0" err="1"/>
               <a:t>aes_key</a:t>
             </a:r>
             <a:r>
-              <a:rPr lang="en-US" dirty="0" smtClean="0"/>
+              <a:rPr lang="en-US" dirty="0"/>
               <a:t>():</a:t>
             </a:r>
           </a:p>
@@ -14912,22 +14527,18 @@
             </a:pPr>
             <a:r>
               <a:rPr lang="en-US" dirty="0"/>
-              <a:t>	</a:t>
-            </a:r>
-            <a:r>
-              <a:rPr lang="en-US" dirty="0" smtClean="0"/>
-              <a:t>return </a:t>
-            </a:r>
-            <a:r>
-              <a:rPr lang="en-US" dirty="0" err="1" smtClean="0"/>
+              <a:t>	return </a:t>
+            </a:r>
+            <a:r>
+              <a:rPr lang="en-US" dirty="0" err="1"/>
               <a:t>Crypto.random.getBytes</a:t>
             </a:r>
             <a:r>
-              <a:rPr lang="en-US" dirty="0" smtClean="0"/>
+              <a:rPr lang="en-US" dirty="0"/>
               <a:t>(</a:t>
             </a:r>
             <a:r>
-              <a:rPr lang="en-US" dirty="0" smtClean="0">
+              <a:rPr lang="en-US" dirty="0">
                 <a:solidFill>
                   <a:srgbClr val="FF0000"/>
                 </a:solidFill>
@@ -14935,7 +14546,7 @@
               <a:t>AES_KEY_SIZE</a:t>
             </a:r>
             <a:r>
-              <a:rPr lang="en-US" dirty="0" smtClean="0"/>
+              <a:rPr lang="en-US" dirty="0"/>
               <a:t>)</a:t>
             </a:r>
           </a:p>
@@ -14944,7 +14555,7 @@
               <a:buNone/>
             </a:pPr>
             <a:r>
-              <a:rPr lang="en-US" dirty="0" smtClean="0"/>
+              <a:rPr lang="en-US" dirty="0"/>
               <a:t>--------------------</a:t>
             </a:r>
           </a:p>
@@ -14953,27 +14564,27 @@
               <a:buNone/>
             </a:pPr>
             <a:r>
-              <a:rPr lang="en-US" dirty="0" err="1" smtClean="0"/>
+              <a:rPr lang="en-US" dirty="0" err="1"/>
               <a:t>def</a:t>
             </a:r>
             <a:r>
-              <a:rPr lang="en-US" dirty="0" smtClean="0"/>
+              <a:rPr lang="en-US" dirty="0"/>
               <a:t> </a:t>
             </a:r>
             <a:r>
-              <a:rPr lang="en-US" dirty="0" err="1" smtClean="0"/>
+              <a:rPr lang="en-US" dirty="0" err="1"/>
               <a:t>encrypt_user_input</a:t>
             </a:r>
             <a:r>
-              <a:rPr lang="en-US" dirty="0" smtClean="0"/>
+              <a:rPr lang="en-US" dirty="0"/>
               <a:t>(</a:t>
             </a:r>
             <a:r>
-              <a:rPr lang="en-US" dirty="0" err="1" smtClean="0"/>
+              <a:rPr lang="en-US" dirty="0" err="1"/>
               <a:t>user_string</a:t>
             </a:r>
             <a:r>
-              <a:rPr lang="en-US" dirty="0" smtClean="0"/>
+              <a:rPr lang="en-US" dirty="0"/>
               <a:t>):</a:t>
             </a:r>
           </a:p>
@@ -14986,19 +14597,19 @@
               <a:t>	</a:t>
             </a:r>
             <a:r>
-              <a:rPr lang="en-US" dirty="0" err="1" smtClean="0"/>
+              <a:rPr lang="en-US" dirty="0" err="1"/>
               <a:t>user_bytes</a:t>
             </a:r>
             <a:r>
-              <a:rPr lang="en-US" dirty="0" smtClean="0"/>
+              <a:rPr lang="en-US" dirty="0"/>
               <a:t> = Encode.utf8.getBytes(</a:t>
             </a:r>
             <a:r>
-              <a:rPr lang="en-US" dirty="0" err="1" smtClean="0"/>
+              <a:rPr lang="en-US" dirty="0" err="1"/>
               <a:t>user_string</a:t>
             </a:r>
             <a:r>
-              <a:rPr lang="en-US" dirty="0" smtClean="0"/>
+              <a:rPr lang="en-US" dirty="0"/>
               <a:t>)</a:t>
             </a:r>
           </a:p>
@@ -15008,18 +14619,14 @@
             </a:pPr>
             <a:r>
               <a:rPr lang="en-US" dirty="0"/>
-              <a:t>	</a:t>
-            </a:r>
-            <a:r>
-              <a:rPr lang="en-US" dirty="0" smtClean="0"/>
-              <a:t>key = </a:t>
-            </a:r>
-            <a:r>
-              <a:rPr lang="en-US" dirty="0" err="1" smtClean="0"/>
+              <a:t>	key = </a:t>
+            </a:r>
+            <a:r>
+              <a:rPr lang="en-US" dirty="0" err="1"/>
               <a:t>generateAesKey</a:t>
             </a:r>
             <a:r>
-              <a:rPr lang="en-US" dirty="0" smtClean="0"/>
+              <a:rPr lang="en-US" dirty="0"/>
               <a:t>()</a:t>
             </a:r>
           </a:p>
@@ -15028,12 +14635,8 @@
               <a:buNone/>
             </a:pPr>
             <a:r>
-              <a:rPr lang="en-US" dirty="0" smtClean="0"/>
-              <a:t>	encrypted = encrypt(key</a:t>
-            </a:r>
-            <a:r>
               <a:rPr lang="en-US" dirty="0"/>
-              <a:t>, </a:t>
+              <a:t>	encrypted = encrypt(key, </a:t>
             </a:r>
             <a:r>
               <a:rPr lang="en-US" dirty="0" err="1"/>
@@ -15041,11 +14644,7 @@
             </a:r>
             <a:r>
               <a:rPr lang="en-US" dirty="0"/>
-              <a:t> </a:t>
-            </a:r>
-            <a:r>
-              <a:rPr lang="en-US" dirty="0" smtClean="0"/>
-              <a:t>, </a:t>
+              <a:t> , </a:t>
             </a:r>
             <a:r>
               <a:rPr lang="en-US" dirty="0">
@@ -15056,7 +14655,7 @@
               <a:t>AES_CBC_WITH_CBC_MAC</a:t>
             </a:r>
             <a:r>
-              <a:rPr lang="en-US" dirty="0" smtClean="0"/>
+              <a:rPr lang="en-US" dirty="0"/>
               <a:t>)</a:t>
             </a:r>
           </a:p>
@@ -15069,19 +14668,19 @@
               <a:t>	</a:t>
             </a:r>
             <a:r>
-              <a:rPr lang="en-US" dirty="0" err="1" smtClean="0"/>
+              <a:rPr lang="en-US" dirty="0" err="1"/>
               <a:t>encrypted_hex</a:t>
             </a:r>
             <a:r>
-              <a:rPr lang="en-US" dirty="0" smtClean="0"/>
+              <a:rPr lang="en-US" dirty="0"/>
               <a:t> = </a:t>
             </a:r>
             <a:r>
-              <a:rPr lang="en-US" dirty="0" err="1" smtClean="0"/>
+              <a:rPr lang="en-US" dirty="0" err="1"/>
               <a:t>Converter.toHex</a:t>
             </a:r>
             <a:r>
-              <a:rPr lang="en-US" dirty="0" smtClean="0"/>
+              <a:rPr lang="en-US" dirty="0"/>
               <a:t>(encrypted)</a:t>
             </a:r>
           </a:p>
@@ -15094,19 +14693,19 @@
               <a:t>	</a:t>
             </a:r>
             <a:r>
-              <a:rPr lang="en-US" dirty="0" err="1" smtClean="0"/>
+              <a:rPr lang="en-US" dirty="0" err="1"/>
               <a:t>key_string</a:t>
             </a:r>
             <a:r>
-              <a:rPr lang="en-US" dirty="0" smtClean="0"/>
+              <a:rPr lang="en-US" dirty="0"/>
               <a:t> = </a:t>
             </a:r>
             <a:r>
-              <a:rPr lang="en-US" dirty="0" err="1" smtClean="0"/>
+              <a:rPr lang="en-US" dirty="0" err="1"/>
               <a:t>Converter.toHex</a:t>
             </a:r>
             <a:r>
-              <a:rPr lang="en-US" dirty="0" smtClean="0"/>
+              <a:rPr lang="en-US" dirty="0"/>
               <a:t>(key)</a:t>
             </a:r>
           </a:p>
@@ -15116,22 +14715,18 @@
             </a:pPr>
             <a:r>
               <a:rPr lang="en-US" dirty="0"/>
-              <a:t>	</a:t>
-            </a:r>
-            <a:r>
-              <a:rPr lang="en-US" dirty="0" smtClean="0"/>
-              <a:t>return </a:t>
-            </a:r>
-            <a:r>
-              <a:rPr lang="en-US" dirty="0" err="1" smtClean="0"/>
+              <a:t>	return </a:t>
+            </a:r>
+            <a:r>
+              <a:rPr lang="en-US" dirty="0" err="1"/>
               <a:t>key_string</a:t>
             </a:r>
             <a:r>
-              <a:rPr lang="en-US" dirty="0" smtClean="0"/>
+              <a:rPr lang="en-US" dirty="0"/>
               <a:t>, </a:t>
             </a:r>
             <a:r>
-              <a:rPr lang="en-US" dirty="0" err="1" smtClean="0"/>
+              <a:rPr lang="en-US" dirty="0" err="1"/>
               <a:t>encrypted_hex</a:t>
             </a:r>
             <a:endParaRPr lang="en-US" dirty="0"/>
@@ -15140,7 +14735,7 @@
             <a:pPr marL="0" indent="0">
               <a:buNone/>
             </a:pPr>
-            <a:endParaRPr lang="en-US" dirty="0" smtClean="0"/>
+            <a:endParaRPr lang="en-US" dirty="0"/>
           </a:p>
           <a:p>
             <a:pPr marL="0" indent="0">
@@ -15183,13 +14778,6 @@
   <p:clrMapOvr>
     <a:masterClrMapping/>
   </p:clrMapOvr>
-  <p:timing>
-    <p:tnLst>
-      <p:par>
-        <p:cTn id="1" dur="indefinite" restart="never" nodeType="tmRoot"/>
-      </p:par>
-    </p:tnLst>
-  </p:timing>
 </p:sld>
 </file>
 
@@ -15281,13 +14869,6 @@
   <p:clrMapOvr>
     <a:masterClrMapping/>
   </p:clrMapOvr>
-  <p:timing>
-    <p:tnLst>
-      <p:par>
-        <p:cTn id="1" dur="indefinite" restart="never" nodeType="tmRoot"/>
-      </p:par>
-    </p:tnLst>
-  </p:timing>
 </p:sld>
 </file>
 
@@ -15324,10 +14905,9 @@
           <a:lstStyle/>
           <a:p>
             <a:r>
-              <a:rPr lang="ru-RU" dirty="0" smtClean="0"/>
+              <a:rPr lang="ru-RU" dirty="0"/>
               <a:t>Историческая задача криптографической защиты информации</a:t>
             </a:r>
-            <a:endParaRPr lang="ru-RU" dirty="0"/>
           </a:p>
         </p:txBody>
       </p:sp>
@@ -15415,10 +14995,9 @@
             <a:lstStyle/>
             <a:p>
               <a:r>
-                <a:rPr lang="en-US" sz="3200" dirty="0" smtClean="0"/>
+                <a:rPr lang="en-US" sz="3200" dirty="0"/>
                 <a:t>Alice</a:t>
               </a:r>
-              <a:endParaRPr lang="en-US" sz="3200" dirty="0"/>
             </a:p>
           </p:txBody>
         </p:sp>
@@ -15484,7 +15063,7 @@
             <a:lstStyle/>
             <a:p>
               <a:r>
-                <a:rPr lang="en-US" sz="3200" dirty="0" smtClean="0"/>
+                <a:rPr lang="en-US" sz="3200" dirty="0"/>
                 <a:t>Bob</a:t>
               </a:r>
             </a:p>
@@ -15649,16 +15228,16 @@
           <a:lstStyle/>
           <a:p>
             <a:r>
-              <a:rPr lang="ru-RU" sz="2600" dirty="0" smtClean="0"/>
+              <a:rPr lang="ru-RU" sz="2600" dirty="0"/>
               <a:t>Передача зашифрованного сообщения по открытому каналу</a:t>
             </a:r>
           </a:p>
           <a:p>
             <a:r>
-              <a:rPr lang="ru-RU" sz="2600" dirty="0" smtClean="0"/>
+              <a:rPr lang="ru-RU" sz="2600" dirty="0"/>
               <a:t>При перехвате зашифрованного сообщения открытый текст должен остаться неизвестным для злоумышленника </a:t>
             </a:r>
-            <a:endParaRPr lang="en-US" sz="2600" dirty="0" smtClean="0"/>
+            <a:endParaRPr lang="en-US" sz="2600" dirty="0"/>
           </a:p>
         </p:txBody>
       </p:sp>
@@ -15844,13 +15423,6 @@
   <p:clrMapOvr>
     <a:masterClrMapping/>
   </p:clrMapOvr>
-  <p:timing>
-    <p:tnLst>
-      <p:par>
-        <p:cTn id="1" dur="indefinite" restart="never" nodeType="tmRoot"/>
-      </p:par>
-    </p:tnLst>
-  </p:timing>
 </p:sld>
 </file>
 
@@ -15887,10 +15459,9 @@
           <a:lstStyle/>
           <a:p>
             <a:r>
-              <a:rPr lang="ru-RU" dirty="0" smtClean="0"/>
+              <a:rPr lang="ru-RU" dirty="0"/>
               <a:t>Шифр Шеннона</a:t>
             </a:r>
-            <a:endParaRPr lang="ru-RU" dirty="0"/>
           </a:p>
         </p:txBody>
       </p:sp>
@@ -15917,11 +15488,11 @@
                   <a:buNone/>
                 </a:pPr>
                 <a:r>
-                  <a:rPr lang="ru-RU" dirty="0" smtClean="0"/>
+                  <a:rPr lang="ru-RU" dirty="0"/>
                   <a:t>Шифр Шеннона  - пара функций</a:t>
                 </a:r>
                 <a:r>
-                  <a:rPr lang="en-US" dirty="0" smtClean="0"/>
+                  <a:rPr lang="en-US" dirty="0"/>
                   <a:t> </a:t>
                 </a:r>
                 <a14:m>
@@ -15979,13 +15550,13 @@
                   </m:oMath>
                 </a14:m>
                 <a:r>
-                  <a:rPr lang="en-US" b="0" dirty="0" smtClean="0"/>
+                  <a:rPr lang="en-US" b="0" dirty="0"/>
                   <a:t>:</a:t>
                 </a:r>
               </a:p>
               <a:p>
                 <a:r>
-                  <a:rPr lang="ru-RU" dirty="0" smtClean="0"/>
+                  <a:rPr lang="ru-RU" dirty="0"/>
                   <a:t>(1) Функция </a:t>
                 </a:r>
                 <a14:m>
@@ -15999,19 +15570,19 @@
                   </m:oMath>
                 </a14:m>
                 <a:r>
-                  <a:rPr lang="ru-RU" b="0" dirty="0" smtClean="0"/>
+                  <a:rPr lang="ru-RU" b="0" dirty="0"/>
                   <a:t> (</a:t>
                 </a:r>
                 <a:r>
-                  <a:rPr lang="ru-RU" b="1" dirty="0" smtClean="0"/>
+                  <a:rPr lang="ru-RU" b="1" dirty="0"/>
                   <a:t>функция </a:t>
                 </a:r>
                 <a:r>
-                  <a:rPr lang="ru-RU" b="1" dirty="0" err="1" smtClean="0"/>
+                  <a:rPr lang="ru-RU" b="1" dirty="0" err="1"/>
                   <a:t>зашифрования</a:t>
                 </a:r>
                 <a:r>
-                  <a:rPr lang="ru-RU" b="0" dirty="0" smtClean="0"/>
+                  <a:rPr lang="ru-RU" b="0" dirty="0"/>
                   <a:t>) принимает на вход ключ </a:t>
                 </a:r>
                 <a14:m>
@@ -16025,11 +15596,11 @@
                   </m:oMath>
                 </a14:m>
                 <a:r>
-                  <a:rPr lang="en-US" b="0" dirty="0" smtClean="0"/>
+                  <a:rPr lang="en-US" b="0" dirty="0"/>
                   <a:t> </a:t>
                 </a:r>
                 <a:r>
-                  <a:rPr lang="ru-RU" b="0" dirty="0" smtClean="0"/>
+                  <a:rPr lang="ru-RU" b="0" dirty="0"/>
                   <a:t>и сообщение </a:t>
                 </a:r>
                 <a14:m>
@@ -16043,27 +15614,27 @@
                   </m:oMath>
                 </a14:m>
                 <a:r>
-                  <a:rPr lang="en-US" b="0" dirty="0" smtClean="0"/>
+                  <a:rPr lang="en-US" b="0" dirty="0"/>
                   <a:t> (</a:t>
                 </a:r>
                 <a:r>
-                  <a:rPr lang="ru-RU" b="0" dirty="0" smtClean="0"/>
+                  <a:rPr lang="ru-RU" b="0" dirty="0"/>
                   <a:t>называемой открытым текстом, </a:t>
                 </a:r>
                 <a:r>
-                  <a:rPr lang="en-US" b="0" dirty="0" smtClean="0"/>
+                  <a:rPr lang="en-US" b="0" dirty="0"/>
                   <a:t>PT) </a:t>
                 </a:r>
                 <a:r>
-                  <a:rPr lang="ru-RU" b="0" dirty="0" smtClean="0"/>
+                  <a:rPr lang="ru-RU" b="0" dirty="0"/>
                   <a:t>и даёт на выходе </a:t>
                 </a:r>
                 <a:r>
-                  <a:rPr lang="ru-RU" b="0" dirty="0" err="1" smtClean="0"/>
+                  <a:rPr lang="ru-RU" b="0" dirty="0" err="1"/>
                   <a:t>шифртекст</a:t>
                 </a:r>
                 <a:r>
-                  <a:rPr lang="ru-RU" b="0" dirty="0" smtClean="0"/>
+                  <a:rPr lang="ru-RU" b="0" dirty="0"/>
                   <a:t> </a:t>
                 </a:r>
                 <a14:m>
@@ -16077,15 +15648,15 @@
                   </m:oMath>
                 </a14:m>
                 <a:r>
-                  <a:rPr lang="ru-RU" b="0" dirty="0" smtClean="0"/>
+                  <a:rPr lang="ru-RU" b="0" dirty="0"/>
                   <a:t> (</a:t>
                 </a:r>
                 <a:r>
-                  <a:rPr lang="en-US" b="0" dirty="0" smtClean="0"/>
+                  <a:rPr lang="en-US" b="0" dirty="0"/>
                   <a:t>CT)</a:t>
                 </a:r>
                 <a:r>
-                  <a:rPr lang="ru-RU" dirty="0" smtClean="0"/>
+                  <a:rPr lang="ru-RU" dirty="0"/>
                   <a:t>, такой что</a:t>
                 </a:r>
               </a:p>
@@ -16151,17 +15722,17 @@
                   </m:oMath>
                 </a14:m>
                 <a:r>
-                  <a:rPr lang="en-US" b="0" dirty="0" smtClean="0"/>
+                  <a:rPr lang="en-US" b="0" dirty="0"/>
                   <a:t> </a:t>
                 </a:r>
-                <a:endParaRPr lang="ru-RU" b="0" dirty="0" smtClean="0"/>
+                <a:endParaRPr lang="ru-RU" b="0" dirty="0"/>
               </a:p>
               <a:p>
                 <a:pPr marL="0" indent="0">
                   <a:buNone/>
                 </a:pPr>
                 <a:r>
-                  <a:rPr lang="ru-RU" b="0" dirty="0" smtClean="0"/>
+                  <a:rPr lang="ru-RU" b="0" dirty="0"/>
                   <a:t>Говорят, что </a:t>
                 </a:r>
                 <a14:m>
@@ -16175,19 +15746,19 @@
                   </m:oMath>
                 </a14:m>
                 <a:r>
-                  <a:rPr lang="en-US" b="0" dirty="0" smtClean="0"/>
+                  <a:rPr lang="en-US" b="0" dirty="0"/>
                   <a:t> </a:t>
                 </a:r>
                 <a:r>
-                  <a:rPr lang="ru-RU" b="0" dirty="0" smtClean="0"/>
+                  <a:rPr lang="ru-RU" b="0" dirty="0"/>
                   <a:t>есть </a:t>
                 </a:r>
                 <a:r>
-                  <a:rPr lang="ru-RU" b="1" dirty="0" err="1" smtClean="0"/>
+                  <a:rPr lang="ru-RU" b="1" dirty="0" err="1"/>
                   <a:t>зашифрование</a:t>
                 </a:r>
                 <a:r>
-                  <a:rPr lang="ru-RU" b="0" dirty="0" smtClean="0"/>
+                  <a:rPr lang="ru-RU" b="0" dirty="0"/>
                   <a:t> </a:t>
                 </a:r>
                 <a14:m>
@@ -16201,11 +15772,11 @@
                   </m:oMath>
                 </a14:m>
                 <a:r>
-                  <a:rPr lang="en-US" b="0" dirty="0" smtClean="0"/>
+                  <a:rPr lang="en-US" b="0" dirty="0"/>
                   <a:t> </a:t>
                 </a:r>
                 <a:r>
-                  <a:rPr lang="ru-RU" b="0" dirty="0" smtClean="0"/>
+                  <a:rPr lang="ru-RU" b="0" dirty="0"/>
                   <a:t>на ключе </a:t>
                 </a:r>
                 <a14:m>
@@ -16219,13 +15790,13 @@
                   </m:oMath>
                 </a14:m>
                 <a:r>
-                  <a:rPr lang="ru-RU" b="0" dirty="0" smtClean="0"/>
+                  <a:rPr lang="ru-RU" b="0" dirty="0"/>
                   <a:t>.</a:t>
                 </a:r>
               </a:p>
               <a:p>
                 <a:r>
-                  <a:rPr lang="ru-RU" dirty="0" smtClean="0"/>
+                  <a:rPr lang="ru-RU" dirty="0"/>
                   <a:t> (2) Функция </a:t>
                 </a:r>
                 <a14:m>
@@ -16239,19 +15810,19 @@
                   </m:oMath>
                 </a14:m>
                 <a:r>
-                  <a:rPr lang="ru-RU" b="0" dirty="0" smtClean="0"/>
+                  <a:rPr lang="ru-RU" b="0" dirty="0"/>
                   <a:t> (</a:t>
                 </a:r>
                 <a:r>
-                  <a:rPr lang="ru-RU" b="1" dirty="0" smtClean="0"/>
+                  <a:rPr lang="ru-RU" b="1" dirty="0"/>
                   <a:t>функция </a:t>
                 </a:r>
                 <a:r>
-                  <a:rPr lang="ru-RU" b="1" dirty="0" err="1" smtClean="0"/>
+                  <a:rPr lang="ru-RU" b="1" dirty="0" err="1"/>
                   <a:t>расшифрования</a:t>
                 </a:r>
                 <a:r>
-                  <a:rPr lang="ru-RU" b="0" dirty="0" smtClean="0"/>
+                  <a:rPr lang="ru-RU" b="0" dirty="0"/>
                   <a:t>) принимает на вход ключ </a:t>
                 </a:r>
                 <a14:m>
@@ -16265,19 +15836,19 @@
                   </m:oMath>
                 </a14:m>
                 <a:r>
-                  <a:rPr lang="en-US" b="0" dirty="0" smtClean="0"/>
+                  <a:rPr lang="en-US" b="0" dirty="0"/>
                   <a:t> </a:t>
                 </a:r>
                 <a:r>
-                  <a:rPr lang="ru-RU" b="0" dirty="0" smtClean="0"/>
+                  <a:rPr lang="ru-RU" b="0" dirty="0"/>
                   <a:t>и </a:t>
                 </a:r>
                 <a:r>
-                  <a:rPr lang="ru-RU" b="0" dirty="0" err="1" smtClean="0"/>
+                  <a:rPr lang="ru-RU" b="0" dirty="0" err="1"/>
                   <a:t>шифртекст</a:t>
                 </a:r>
                 <a:r>
-                  <a:rPr lang="ru-RU" b="0" dirty="0" smtClean="0"/>
+                  <a:rPr lang="ru-RU" b="0" dirty="0"/>
                   <a:t> </a:t>
                 </a:r>
                 <a14:m>
@@ -16291,11 +15862,11 @@
                   </m:oMath>
                 </a14:m>
                 <a:r>
-                  <a:rPr lang="en-US" b="0" dirty="0" smtClean="0"/>
+                  <a:rPr lang="en-US" b="0" dirty="0"/>
                   <a:t> </a:t>
                 </a:r>
                 <a:r>
-                  <a:rPr lang="ru-RU" b="0" dirty="0" smtClean="0"/>
+                  <a:rPr lang="ru-RU" b="0" dirty="0"/>
                   <a:t>и даёт на выходе сообщение </a:t>
                 </a:r>
                 <a14:m>
@@ -16309,7 +15880,7 @@
                   </m:oMath>
                 </a14:m>
                 <a:r>
-                  <a:rPr lang="ru-RU" b="0" dirty="0" smtClean="0"/>
+                  <a:rPr lang="ru-RU" b="0" dirty="0"/>
                   <a:t>, такое что</a:t>
                 </a:r>
               </a:p>
@@ -16318,7 +15889,7 @@
                   <a:buNone/>
                 </a:pPr>
                 <a:r>
-                  <a:rPr lang="ru-RU" b="0" dirty="0" smtClean="0"/>
+                  <a:rPr lang="ru-RU" b="0" dirty="0"/>
                   <a:t> </a:t>
                 </a:r>
                 <a14:m>
@@ -16372,14 +15943,14 @@
                     </m:d>
                   </m:oMath>
                 </a14:m>
-                <a:endParaRPr lang="ru-RU" b="0" dirty="0" smtClean="0"/>
+                <a:endParaRPr lang="ru-RU" b="0" dirty="0"/>
               </a:p>
               <a:p>
                 <a:pPr marL="0" indent="0">
                   <a:buNone/>
                 </a:pPr>
                 <a:r>
-                  <a:rPr lang="ru-RU" dirty="0" smtClean="0"/>
+                  <a:rPr lang="ru-RU" dirty="0"/>
                   <a:t>Говорят, что </a:t>
                 </a:r>
                 <a14:m>
@@ -16393,15 +15964,15 @@
                   </m:oMath>
                 </a14:m>
                 <a:r>
-                  <a:rPr lang="ru-RU" b="0" dirty="0" smtClean="0"/>
+                  <a:rPr lang="ru-RU" b="0" dirty="0"/>
                   <a:t> это </a:t>
                 </a:r>
                 <a:r>
-                  <a:rPr lang="ru-RU" b="1" dirty="0" err="1" smtClean="0"/>
+                  <a:rPr lang="ru-RU" b="1" dirty="0" err="1"/>
                   <a:t>расшифрование</a:t>
                 </a:r>
                 <a:r>
-                  <a:rPr lang="ru-RU" b="0" dirty="0" smtClean="0"/>
+                  <a:rPr lang="ru-RU" b="0" dirty="0"/>
                   <a:t> </a:t>
                 </a:r>
                 <a14:m>
@@ -16415,7 +15986,7 @@
                   </m:oMath>
                 </a14:m>
                 <a:r>
-                  <a:rPr lang="ru-RU" b="0" dirty="0" smtClean="0"/>
+                  <a:rPr lang="ru-RU" b="0" dirty="0"/>
                   <a:t> на ключе </a:t>
                 </a:r>
                 <a14:m>
@@ -16429,13 +16000,13 @@
                   </m:oMath>
                 </a14:m>
                 <a:r>
-                  <a:rPr lang="ru-RU" b="0" dirty="0" smtClean="0"/>
+                  <a:rPr lang="ru-RU" b="0" dirty="0"/>
                   <a:t>.</a:t>
                 </a:r>
-                <a:endParaRPr lang="en-US" b="0" dirty="0" smtClean="0"/>
+                <a:endParaRPr lang="en-US" b="0" dirty="0"/>
               </a:p>
               <a:p>
-                <a:endParaRPr lang="en-US" b="0" dirty="0" smtClean="0"/>
+                <a:endParaRPr lang="en-US" b="0" dirty="0"/>
               </a:p>
               <a:p>
                 <a:endParaRPr lang="ru-RU" dirty="0"/>
@@ -16510,13 +16081,6 @@
   <p:clrMapOvr>
     <a:masterClrMapping/>
   </p:clrMapOvr>
-  <p:timing>
-    <p:tnLst>
-      <p:par>
-        <p:cTn id="1" dur="indefinite" restart="never" nodeType="tmRoot"/>
-      </p:par>
-    </p:tnLst>
-  </p:timing>
 </p:sld>
 </file>
 
@@ -16553,10 +16117,9 @@
           <a:lstStyle/>
           <a:p>
             <a:r>
-              <a:rPr lang="ru-RU" dirty="0" smtClean="0"/>
+              <a:rPr lang="ru-RU" dirty="0"/>
               <a:t>Шифр Шеннона</a:t>
             </a:r>
-            <a:endParaRPr lang="ru-RU" dirty="0"/>
           </a:p>
         </p:txBody>
       </p:sp>
@@ -16580,7 +16143,7 @@
               <a:lstStyle/>
               <a:p>
                 <a:r>
-                  <a:rPr lang="ru-RU" dirty="0" smtClean="0"/>
+                  <a:rPr lang="ru-RU" dirty="0"/>
                   <a:t>(3) Функция </a:t>
                 </a:r>
                 <a14:m>
@@ -16594,11 +16157,11 @@
                   </m:oMath>
                 </a14:m>
                 <a:r>
-                  <a:rPr lang="ru-RU" b="0" dirty="0" smtClean="0"/>
+                  <a:rPr lang="ru-RU" b="0" dirty="0"/>
                   <a:t> обращает функци</a:t>
                 </a:r>
                 <a:r>
-                  <a:rPr lang="ru-RU" dirty="0" smtClean="0"/>
+                  <a:rPr lang="ru-RU" dirty="0"/>
                   <a:t>ю </a:t>
                 </a:r>
                 <a14:m>
@@ -16612,19 +16175,19 @@
                   </m:oMath>
                 </a14:m>
                 <a:r>
-                  <a:rPr lang="en-US" b="0" dirty="0" smtClean="0"/>
+                  <a:rPr lang="en-US" b="0" dirty="0"/>
                   <a:t> (</a:t>
                 </a:r>
                 <a:r>
-                  <a:rPr lang="ru-RU" b="1" dirty="0" smtClean="0"/>
+                  <a:rPr lang="ru-RU" b="1" dirty="0"/>
                   <a:t>свойство корректности</a:t>
                 </a:r>
                 <a:r>
-                  <a:rPr lang="ru-RU" b="0" dirty="0" smtClean="0"/>
+                  <a:rPr lang="ru-RU" b="0" dirty="0"/>
                   <a:t>)</a:t>
                 </a:r>
                 <a:r>
-                  <a:rPr lang="en-US" b="0" dirty="0" smtClean="0"/>
+                  <a:rPr lang="en-US" b="0" dirty="0"/>
                   <a:t>: </a:t>
                 </a:r>
               </a:p>
@@ -16753,17 +16316,17 @@
                     </m:oMath>
                   </m:oMathPara>
                 </a14:m>
-                <a:endParaRPr lang="en-US" b="0" dirty="0" smtClean="0"/>
+                <a:endParaRPr lang="en-US" b="0" dirty="0"/>
               </a:p>
               <a:p>
-                <a:endParaRPr lang="en-US" b="0" dirty="0" smtClean="0"/>
+                <a:endParaRPr lang="en-US" b="0" dirty="0"/>
               </a:p>
               <a:p>
                 <a:pPr marL="0" indent="0">
                   <a:buNone/>
                 </a:pPr>
                 <a:r>
-                  <a:rPr lang="ru-RU" dirty="0" smtClean="0"/>
+                  <a:rPr lang="ru-RU" dirty="0"/>
                   <a:t>Пусть </a:t>
                 </a:r>
                 <a14:m>
@@ -16777,15 +16340,15 @@
                   </m:oMath>
                 </a14:m>
                 <a:r>
-                  <a:rPr lang="en-US" dirty="0" smtClean="0"/>
+                  <a:rPr lang="en-US" dirty="0"/>
                   <a:t> – </a:t>
                 </a:r>
                 <a:r>
-                  <a:rPr lang="ru-RU" b="1" dirty="0" smtClean="0"/>
+                  <a:rPr lang="ru-RU" b="1" dirty="0"/>
                   <a:t>множество ключей</a:t>
                 </a:r>
                 <a:r>
-                  <a:rPr lang="ru-RU" dirty="0" smtClean="0"/>
+                  <a:rPr lang="ru-RU" dirty="0"/>
                   <a:t>, </a:t>
                 </a:r>
                 <a14:m>
@@ -16799,15 +16362,15 @@
                   </m:oMath>
                 </a14:m>
                 <a:r>
-                  <a:rPr lang="en-US" b="1" dirty="0" smtClean="0"/>
+                  <a:rPr lang="en-US" b="1" dirty="0"/>
                   <a:t> – </a:t>
                 </a:r>
                 <a:r>
-                  <a:rPr lang="ru-RU" b="1" dirty="0" smtClean="0"/>
+                  <a:rPr lang="ru-RU" b="1" dirty="0"/>
                   <a:t>множество сообщений</a:t>
                 </a:r>
                 <a:r>
-                  <a:rPr lang="ru-RU" dirty="0" smtClean="0"/>
+                  <a:rPr lang="ru-RU" dirty="0"/>
                   <a:t>, </a:t>
                 </a:r>
                 <a14:m>
@@ -16821,19 +16384,19 @@
                   </m:oMath>
                 </a14:m>
                 <a:r>
-                  <a:rPr lang="en-US" b="1" dirty="0" smtClean="0"/>
+                  <a:rPr lang="en-US" b="1" dirty="0"/>
                   <a:t> </a:t>
                 </a:r>
                 <a:r>
-                  <a:rPr lang="ru-RU" b="1" dirty="0" smtClean="0"/>
+                  <a:rPr lang="ru-RU" b="1" dirty="0"/>
                   <a:t>– множество </a:t>
                 </a:r>
                 <a:r>
-                  <a:rPr lang="ru-RU" b="1" dirty="0" err="1" smtClean="0"/>
+                  <a:rPr lang="ru-RU" b="1" dirty="0" err="1"/>
                   <a:t>шифртекстов</a:t>
                 </a:r>
                 <a:r>
-                  <a:rPr lang="ru-RU" dirty="0" smtClean="0"/>
+                  <a:rPr lang="ru-RU" dirty="0"/>
                   <a:t>. </a:t>
                 </a:r>
               </a:p>
@@ -16842,7 +16405,7 @@
                   <a:buNone/>
                 </a:pPr>
                 <a:r>
-                  <a:rPr lang="ru-RU" dirty="0" smtClean="0"/>
+                  <a:rPr lang="ru-RU" dirty="0"/>
                   <a:t>Тогда шифром  Шеннона, определённым над </a:t>
                 </a:r>
                 <a14:m>
@@ -16891,11 +16454,11 @@
                   </m:oMath>
                 </a14:m>
                 <a:r>
-                  <a:rPr lang="ru-RU" b="1" dirty="0" smtClean="0"/>
+                  <a:rPr lang="ru-RU" b="1" dirty="0"/>
                   <a:t> </a:t>
                 </a:r>
                 <a:r>
-                  <a:rPr lang="ru-RU" dirty="0" smtClean="0"/>
+                  <a:rPr lang="ru-RU" dirty="0"/>
                   <a:t>называют пару функций </a:t>
                 </a:r>
                 <a14:m>
@@ -16952,7 +16515,7 @@
                     </m:r>
                   </m:oMath>
                 </a14:m>
-                <a:endParaRPr lang="en-US" b="1" dirty="0" smtClean="0"/>
+                <a:endParaRPr lang="en-US" b="1" dirty="0"/>
               </a:p>
               <a:p>
                 <a:pPr marL="0" indent="0">
@@ -17015,7 +16578,7 @@
                     </m:oMath>
                   </m:oMathPara>
                 </a14:m>
-                <a:endParaRPr lang="en-US" dirty="0" smtClean="0"/>
+                <a:endParaRPr lang="en-US" dirty="0"/>
               </a:p>
               <a:p>
                 <a:pPr marL="0" indent="0">
@@ -17078,17 +16641,16 @@
                     </m:oMath>
                   </m:oMathPara>
                 </a14:m>
-                <a:endParaRPr lang="ru-RU" dirty="0" smtClean="0"/>
+                <a:endParaRPr lang="ru-RU" dirty="0"/>
               </a:p>
               <a:p>
                 <a:pPr marL="0" indent="0">
                   <a:buNone/>
                 </a:pPr>
                 <a:r>
-                  <a:rPr lang="ru-RU" dirty="0" smtClean="0"/>
+                  <a:rPr lang="ru-RU" dirty="0"/>
                   <a:t>для которых выполняются свойства (1) – (3).</a:t>
                 </a:r>
-                <a:endParaRPr lang="ru-RU" dirty="0"/>
               </a:p>
             </p:txBody>
           </p:sp>
@@ -17160,13 +16722,6 @@
   <p:clrMapOvr>
     <a:masterClrMapping/>
   </p:clrMapOvr>
-  <p:timing>
-    <p:tnLst>
-      <p:par>
-        <p:cTn id="1" dur="indefinite" restart="never" nodeType="tmRoot"/>
-      </p:par>
-    </p:tnLst>
-  </p:timing>
 </p:sld>
 </file>
 
@@ -17203,18 +16758,17 @@
           <a:lstStyle/>
           <a:p>
             <a:r>
-              <a:rPr lang="ru-RU" dirty="0" smtClean="0"/>
+              <a:rPr lang="ru-RU" dirty="0"/>
               <a:t>Пример</a:t>
             </a:r>
             <a:r>
-              <a:rPr lang="en-US" dirty="0" smtClean="0"/>
+              <a:rPr lang="en-US" dirty="0"/>
               <a:t>: </a:t>
             </a:r>
             <a:r>
-              <a:rPr lang="ru-RU" dirty="0" smtClean="0"/>
+              <a:rPr lang="ru-RU" dirty="0"/>
               <a:t>Одноразовый блокнот</a:t>
             </a:r>
-            <a:endParaRPr lang="ru-RU" dirty="0"/>
           </a:p>
         </p:txBody>
       </p:sp>
@@ -17246,7 +16800,7 @@
                   <a:buNone/>
                 </a:pPr>
                 <a:r>
-                  <a:rPr lang="ru-RU" dirty="0" smtClean="0"/>
+                  <a:rPr lang="ru-RU" dirty="0"/>
                   <a:t>Пусть </a:t>
                 </a:r>
                 <a14:m>
@@ -17293,15 +16847,15 @@
                   </m:oMath>
                 </a14:m>
                 <a:r>
-                  <a:rPr lang="en-US" dirty="0" smtClean="0"/>
+                  <a:rPr lang="en-US" dirty="0"/>
                   <a:t> – </a:t>
                 </a:r>
                 <a:r>
-                  <a:rPr lang="ru-RU" b="1" dirty="0" smtClean="0"/>
+                  <a:rPr lang="ru-RU" b="1" dirty="0"/>
                   <a:t>шифр Шеннона</a:t>
                 </a:r>
                 <a:r>
-                  <a:rPr lang="ru-RU" dirty="0" smtClean="0"/>
+                  <a:rPr lang="ru-RU" dirty="0"/>
                   <a:t>, для которого </a:t>
                 </a:r>
                 <a14:m>
@@ -17383,7 +16937,7 @@
                   </m:oMath>
                 </a14:m>
                 <a:r>
-                  <a:rPr lang="ru-RU" b="0" dirty="0" smtClean="0"/>
+                  <a:rPr lang="ru-RU" b="0" dirty="0"/>
                   <a:t>, где </a:t>
                 </a:r>
                 <a14:m>
@@ -17397,11 +16951,11 @@
                   </m:oMath>
                 </a14:m>
                 <a:r>
-                  <a:rPr lang="en-US" b="0" dirty="0" smtClean="0"/>
+                  <a:rPr lang="en-US" b="0" dirty="0"/>
                   <a:t> – </a:t>
                 </a:r>
                 <a:r>
-                  <a:rPr lang="ru-RU" b="0" dirty="0" smtClean="0"/>
+                  <a:rPr lang="ru-RU" b="0" dirty="0"/>
                   <a:t>фиксированный параметр.</a:t>
                 </a:r>
                 <a:endParaRPr lang="ru-RU" dirty="0"/>
@@ -17411,7 +16965,7 @@
                   <a:buNone/>
                 </a:pPr>
                 <a:r>
-                  <a:rPr lang="ru-RU" b="0" dirty="0" smtClean="0"/>
+                  <a:rPr lang="ru-RU" b="0" dirty="0"/>
                   <a:t>Для ключа </a:t>
                 </a:r>
                 <a14:m>
@@ -17437,11 +16991,11 @@
                   </m:oMath>
                 </a14:m>
                 <a:r>
-                  <a:rPr lang="en-US" b="0" dirty="0" smtClean="0"/>
+                  <a:rPr lang="en-US" b="0" dirty="0"/>
                   <a:t> </a:t>
                 </a:r>
                 <a:r>
-                  <a:rPr lang="ru-RU" b="0" dirty="0" smtClean="0"/>
+                  <a:rPr lang="ru-RU" b="0" dirty="0"/>
                   <a:t>и сообщения </a:t>
                 </a:r>
                 <a14:m>
@@ -17467,7 +17021,7 @@
                   </m:oMath>
                 </a14:m>
                 <a:r>
-                  <a:rPr lang="en-US" b="0" dirty="0" smtClean="0"/>
+                  <a:rPr lang="en-US" b="0" dirty="0"/>
                   <a:t> </a:t>
                 </a:r>
                 <a:r>
@@ -17475,19 +17029,19 @@
                   <a:t>функция</a:t>
                 </a:r>
                 <a:r>
-                  <a:rPr lang="ru-RU" b="0" dirty="0" smtClean="0"/>
+                  <a:rPr lang="ru-RU" b="0" dirty="0"/>
                   <a:t> </a:t>
                 </a:r>
                 <a:r>
-                  <a:rPr lang="ru-RU" b="1" dirty="0" err="1" smtClean="0"/>
+                  <a:rPr lang="ru-RU" b="1" dirty="0" err="1"/>
                   <a:t>зашифрования</a:t>
                 </a:r>
                 <a:r>
-                  <a:rPr lang="ru-RU" b="0" dirty="0" smtClean="0"/>
+                  <a:rPr lang="ru-RU" b="0" dirty="0"/>
                   <a:t> определена как</a:t>
                 </a:r>
                 <a:r>
-                  <a:rPr lang="en-US" b="0" dirty="0" smtClean="0"/>
+                  <a:rPr lang="en-US" b="0" dirty="0"/>
                   <a:t>:</a:t>
                 </a:r>
               </a:p>
@@ -17569,14 +17123,14 @@
                     </m:oMath>
                   </m:oMathPara>
                 </a14:m>
-                <a:endParaRPr lang="en-US" b="0" dirty="0" smtClean="0"/>
+                <a:endParaRPr lang="en-US" b="0" dirty="0"/>
               </a:p>
               <a:p>
                 <a:pPr marL="0" indent="0">
                   <a:buNone/>
                 </a:pPr>
                 <a:r>
-                  <a:rPr lang="ru-RU" dirty="0" smtClean="0"/>
+                  <a:rPr lang="ru-RU" dirty="0"/>
                   <a:t>Для ключа </a:t>
                 </a:r>
                 <a14:m>
@@ -17602,15 +17156,15 @@
                   </m:oMath>
                 </a14:m>
                 <a:r>
-                  <a:rPr lang="ru-RU" b="0" dirty="0" smtClean="0"/>
+                  <a:rPr lang="ru-RU" b="0" dirty="0"/>
                   <a:t> и </a:t>
                 </a:r>
                 <a:r>
-                  <a:rPr lang="ru-RU" b="0" dirty="0" err="1" smtClean="0"/>
+                  <a:rPr lang="ru-RU" b="0" dirty="0" err="1"/>
                   <a:t>шифртекста</a:t>
                 </a:r>
                 <a:r>
-                  <a:rPr lang="ru-RU" b="0" dirty="0" smtClean="0"/>
+                  <a:rPr lang="ru-RU" b="0" dirty="0"/>
                   <a:t> </a:t>
                 </a:r>
                 <a14:m>
@@ -17636,23 +17190,23 @@
                   </m:oMath>
                 </a14:m>
                 <a:r>
-                  <a:rPr lang="en-US" b="0" dirty="0" smtClean="0"/>
+                  <a:rPr lang="en-US" b="0" dirty="0"/>
                   <a:t> </a:t>
                 </a:r>
                 <a:r>
-                  <a:rPr lang="ru-RU" b="0" dirty="0" smtClean="0"/>
+                  <a:rPr lang="ru-RU" b="0" dirty="0"/>
                   <a:t>функция </a:t>
                 </a:r>
                 <a:r>
-                  <a:rPr lang="ru-RU" b="1" dirty="0" err="1" smtClean="0"/>
+                  <a:rPr lang="ru-RU" b="1" dirty="0" err="1"/>
                   <a:t>расшифрования</a:t>
                 </a:r>
                 <a:r>
-                  <a:rPr lang="ru-RU" b="0" dirty="0" smtClean="0"/>
+                  <a:rPr lang="ru-RU" b="0" dirty="0"/>
                   <a:t> определена как</a:t>
                 </a:r>
                 <a:r>
-                  <a:rPr lang="en-US" b="0" dirty="0" smtClean="0"/>
+                  <a:rPr lang="en-US" b="0" dirty="0"/>
                   <a:t>:</a:t>
                 </a:r>
               </a:p>
@@ -17734,7 +17288,7 @@
                     </m:oMath>
                   </m:oMathPara>
                 </a14:m>
-                <a:endParaRPr lang="en-US" b="0" dirty="0" smtClean="0"/>
+                <a:endParaRPr lang="en-US" b="0" dirty="0"/>
               </a:p>
               <a:p>
                 <a:pPr marL="0" indent="0">
@@ -17751,19 +17305,19 @@
                   </m:oMath>
                 </a14:m>
                 <a:r>
-                  <a:rPr lang="en-US" b="0" dirty="0" smtClean="0"/>
+                  <a:rPr lang="en-US" b="0" dirty="0"/>
                   <a:t> - </a:t>
                 </a:r>
                 <a:r>
-                  <a:rPr lang="ru-RU" b="0" dirty="0" smtClean="0"/>
+                  <a:rPr lang="ru-RU" b="0" dirty="0"/>
                   <a:t>побитное сложение по модулю 2 (</a:t>
                 </a:r>
                 <a:r>
-                  <a:rPr lang="en-US" b="0" dirty="0" smtClean="0"/>
+                  <a:rPr lang="en-US" b="0" dirty="0"/>
                   <a:t>XOR)</a:t>
                 </a:r>
                 <a:r>
-                  <a:rPr lang="ru-RU" b="0" dirty="0" smtClean="0"/>
+                  <a:rPr lang="ru-RU" b="0" dirty="0"/>
                   <a:t>.</a:t>
                 </a:r>
                 <a:endParaRPr lang="ru-RU" dirty="0"/>
@@ -17773,11 +17327,11 @@
                   <a:buNone/>
                 </a:pPr>
                 <a:r>
-                  <a:rPr lang="ru-RU" b="1" dirty="0" err="1" smtClean="0"/>
+                  <a:rPr lang="ru-RU" b="1" dirty="0" err="1"/>
                   <a:t>Корректноть</a:t>
                 </a:r>
                 <a:r>
-                  <a:rPr lang="en-US" dirty="0" smtClean="0"/>
+                  <a:rPr lang="en-US" dirty="0"/>
                   <a:t>: </a:t>
                 </a:r>
                 <a14:m>
@@ -18056,7 +17610,7 @@
                     </m:r>
                   </m:oMath>
                 </a14:m>
-                <a:endParaRPr lang="ru-RU" b="0" dirty="0" smtClean="0"/>
+                <a:endParaRPr lang="ru-RU" b="0" dirty="0"/>
               </a:p>
             </p:txBody>
           </p:sp>
@@ -18132,13 +17686,6 @@
   <p:clrMapOvr>
     <a:masterClrMapping/>
   </p:clrMapOvr>
-  <p:timing>
-    <p:tnLst>
-      <p:par>
-        <p:cTn id="1" dur="indefinite" restart="never" nodeType="tmRoot"/>
-      </p:par>
-    </p:tnLst>
-  </p:timing>
 </p:sld>
 </file>
 
@@ -18175,23 +17722,22 @@
           <a:lstStyle/>
           <a:p>
             <a:r>
-              <a:rPr lang="ru-RU" dirty="0" smtClean="0"/>
+              <a:rPr lang="ru-RU" dirty="0"/>
               <a:t>Пример</a:t>
             </a:r>
             <a:r>
-              <a:rPr lang="en-US" dirty="0" smtClean="0"/>
+              <a:rPr lang="en-US" dirty="0"/>
               <a:t>: </a:t>
             </a:r>
             <a:r>
-              <a:rPr lang="ru-RU" dirty="0" smtClean="0"/>
+              <a:rPr lang="ru-RU" dirty="0"/>
               <a:t>Аддитивный одноразовый блокнот</a:t>
             </a:r>
-            <a:endParaRPr lang="ru-RU" dirty="0"/>
           </a:p>
         </p:txBody>
       </p:sp>
-      <mc:AlternateContent xmlns:mc="http://schemas.openxmlformats.org/markup-compatibility/2006" xmlns:a14="http://schemas.microsoft.com/office/drawing/2010/main">
-        <mc:Choice Requires="a14">
+      <mc:AlternateContent xmlns:mc="http://schemas.openxmlformats.org/markup-compatibility/2006">
+        <mc:Choice xmlns:a14="http://schemas.microsoft.com/office/drawing/2010/main" Requires="a14">
           <p:sp>
             <p:nvSpPr>
               <p:cNvPr id="3" name="Объект 2"/>
@@ -18218,7 +17764,7 @@
                   <a:buNone/>
                 </a:pPr>
                 <a:r>
-                  <a:rPr lang="ru-RU" dirty="0" smtClean="0"/>
+                  <a:rPr lang="ru-RU" dirty="0"/>
                   <a:t>Пусть </a:t>
                 </a:r>
                 <a14:m>
@@ -18265,15 +17811,15 @@
                   </m:oMath>
                 </a14:m>
                 <a:r>
-                  <a:rPr lang="en-US" dirty="0" smtClean="0"/>
+                  <a:rPr lang="en-US" dirty="0"/>
                   <a:t> – </a:t>
                 </a:r>
                 <a:r>
-                  <a:rPr lang="ru-RU" b="1" dirty="0" smtClean="0"/>
+                  <a:rPr lang="ru-RU" b="1" dirty="0"/>
                   <a:t>шифр Шеннона</a:t>
                 </a:r>
                 <a:r>
-                  <a:rPr lang="ru-RU" dirty="0" smtClean="0"/>
+                  <a:rPr lang="ru-RU" dirty="0"/>
                   <a:t>, для которого </a:t>
                 </a:r>
                 <a14:m>
@@ -18367,7 +17913,7 @@
                   </m:oMath>
                 </a14:m>
                 <a:r>
-                  <a:rPr lang="ru-RU" b="0" dirty="0" smtClean="0"/>
+                  <a:rPr lang="ru-RU" b="0" dirty="0"/>
                   <a:t>, где </a:t>
                 </a:r>
                 <a14:m>
@@ -18393,11 +17939,11 @@
                   </m:oMath>
                 </a14:m>
                 <a:r>
-                  <a:rPr lang="en-US" b="0" dirty="0" smtClean="0"/>
+                  <a:rPr lang="en-US" b="0" dirty="0"/>
                   <a:t> – </a:t>
                 </a:r>
                 <a:r>
-                  <a:rPr lang="ru-RU" b="0" smtClean="0"/>
+                  <a:rPr lang="ru-RU" b="0" dirty="0"/>
                   <a:t>фиксированные параметры.</a:t>
                 </a:r>
                 <a:endParaRPr lang="ru-RU" dirty="0"/>
@@ -18407,7 +17953,7 @@
                   <a:buNone/>
                 </a:pPr>
                 <a:r>
-                  <a:rPr lang="ru-RU" b="0" dirty="0" smtClean="0"/>
+                  <a:rPr lang="ru-RU" b="0" dirty="0"/>
                   <a:t>Для ключа </a:t>
                 </a:r>
                 <a14:m>
@@ -18433,11 +17979,11 @@
                   </m:oMath>
                 </a14:m>
                 <a:r>
-                  <a:rPr lang="en-US" b="0" dirty="0" smtClean="0"/>
+                  <a:rPr lang="en-US" b="0" dirty="0"/>
                   <a:t> </a:t>
                 </a:r>
                 <a:r>
-                  <a:rPr lang="ru-RU" b="0" dirty="0" smtClean="0"/>
+                  <a:rPr lang="ru-RU" b="0" dirty="0"/>
                   <a:t>и сообщения </a:t>
                 </a:r>
                 <a14:m>
@@ -18463,7 +18009,7 @@
                   </m:oMath>
                 </a14:m>
                 <a:r>
-                  <a:rPr lang="en-US" b="0" dirty="0" smtClean="0"/>
+                  <a:rPr lang="en-US" b="0" dirty="0"/>
                   <a:t> </a:t>
                 </a:r>
                 <a:r>
@@ -18471,19 +18017,19 @@
                   <a:t>функция</a:t>
                 </a:r>
                 <a:r>
-                  <a:rPr lang="ru-RU" b="0" dirty="0" smtClean="0"/>
+                  <a:rPr lang="ru-RU" b="0" dirty="0"/>
                   <a:t> </a:t>
                 </a:r>
                 <a:r>
-                  <a:rPr lang="ru-RU" b="1" dirty="0" err="1" smtClean="0"/>
+                  <a:rPr lang="ru-RU" b="1" dirty="0" err="1"/>
                   <a:t>зашифрования</a:t>
                 </a:r>
                 <a:r>
-                  <a:rPr lang="ru-RU" b="0" dirty="0" smtClean="0"/>
+                  <a:rPr lang="ru-RU" b="0" dirty="0"/>
                   <a:t> определена как</a:t>
                 </a:r>
                 <a:r>
-                  <a:rPr lang="en-US" b="0" dirty="0" smtClean="0"/>
+                  <a:rPr lang="en-US" b="0" dirty="0"/>
                   <a:t>:</a:t>
                 </a:r>
               </a:p>
@@ -18597,14 +18143,14 @@
                     </m:oMath>
                   </m:oMathPara>
                 </a14:m>
-                <a:endParaRPr lang="en-US" b="0" dirty="0" smtClean="0"/>
+                <a:endParaRPr lang="en-US" b="0" dirty="0"/>
               </a:p>
               <a:p>
                 <a:pPr marL="0" indent="0">
                   <a:buNone/>
                 </a:pPr>
                 <a:r>
-                  <a:rPr lang="ru-RU" dirty="0" smtClean="0"/>
+                  <a:rPr lang="ru-RU" dirty="0"/>
                   <a:t>Для ключа </a:t>
                 </a:r>
                 <a14:m>
@@ -18630,15 +18176,15 @@
                   </m:oMath>
                 </a14:m>
                 <a:r>
-                  <a:rPr lang="ru-RU" b="0" dirty="0" smtClean="0"/>
+                  <a:rPr lang="ru-RU" b="0" dirty="0"/>
                   <a:t> и </a:t>
                 </a:r>
                 <a:r>
-                  <a:rPr lang="ru-RU" b="0" dirty="0" err="1" smtClean="0"/>
+                  <a:rPr lang="ru-RU" b="0" dirty="0" err="1"/>
                   <a:t>шифртекста</a:t>
                 </a:r>
                 <a:r>
-                  <a:rPr lang="ru-RU" b="0" dirty="0" smtClean="0"/>
+                  <a:rPr lang="ru-RU" b="0" dirty="0"/>
                   <a:t> </a:t>
                 </a:r>
                 <a14:m>
@@ -18664,23 +18210,23 @@
                   </m:oMath>
                 </a14:m>
                 <a:r>
-                  <a:rPr lang="en-US" b="0" dirty="0" smtClean="0"/>
+                  <a:rPr lang="en-US" b="0" dirty="0"/>
                   <a:t> </a:t>
                 </a:r>
                 <a:r>
-                  <a:rPr lang="ru-RU" b="0" dirty="0" smtClean="0"/>
+                  <a:rPr lang="ru-RU" b="0" dirty="0"/>
                   <a:t>функция </a:t>
                 </a:r>
                 <a:r>
-                  <a:rPr lang="ru-RU" b="1" dirty="0" err="1" smtClean="0"/>
+                  <a:rPr lang="ru-RU" b="1" dirty="0" err="1"/>
                   <a:t>расшифрования</a:t>
                 </a:r>
                 <a:r>
-                  <a:rPr lang="ru-RU" b="0" dirty="0" smtClean="0"/>
+                  <a:rPr lang="ru-RU" b="0" dirty="0"/>
                   <a:t> определена как</a:t>
                 </a:r>
                 <a:r>
-                  <a:rPr lang="en-US" b="0" dirty="0" smtClean="0"/>
+                  <a:rPr lang="en-US" b="0" dirty="0"/>
                   <a:t>:</a:t>
                 </a:r>
               </a:p>
@@ -18794,18 +18340,18 @@
                     </m:oMath>
                   </m:oMathPara>
                 </a14:m>
-                <a:endParaRPr lang="en-US" b="0" dirty="0" smtClean="0"/>
+                <a:endParaRPr lang="en-US" b="0" dirty="0"/>
               </a:p>
               <a:p>
                 <a:pPr marL="0" indent="0">
                   <a:buNone/>
                 </a:pPr>
                 <a:r>
-                  <a:rPr lang="ru-RU" b="1" dirty="0" err="1" smtClean="0"/>
-                  <a:t>Корректноть</a:t>
-                </a:r>
-                <a:r>
-                  <a:rPr lang="en-US" dirty="0" smtClean="0"/>
+                  <a:rPr lang="ru-RU" b="1" dirty="0"/>
+                  <a:t>Корректность</a:t>
+                </a:r>
+                <a:r>
+                  <a:rPr lang="en-US" dirty="0"/>
                   <a:t>: </a:t>
                 </a:r>
                 <a14:m>
@@ -18994,12 +18540,12 @@
                     </m:r>
                   </m:oMath>
                 </a14:m>
-                <a:endParaRPr lang="ru-RU" b="0" dirty="0" smtClean="0"/>
+                <a:endParaRPr lang="ru-RU" b="0" dirty="0"/>
               </a:p>
             </p:txBody>
           </p:sp>
         </mc:Choice>
-        <mc:Fallback xmlns="">
+        <mc:Fallback>
           <p:sp>
             <p:nvSpPr>
               <p:cNvPr id="3" name="Объект 2"/>
@@ -19070,13 +18616,6 @@
   <p:clrMapOvr>
     <a:masterClrMapping/>
   </p:clrMapOvr>
-  <p:timing>
-    <p:tnLst>
-      <p:par>
-        <p:cTn id="1" dur="indefinite" restart="never" nodeType="tmRoot"/>
-      </p:par>
-    </p:tnLst>
-  </p:timing>
 </p:sld>
 </file>
 
@@ -19113,10 +18652,9 @@
           <a:lstStyle/>
           <a:p>
             <a:r>
-              <a:rPr lang="ru-RU" dirty="0" smtClean="0"/>
+              <a:rPr lang="ru-RU" dirty="0"/>
               <a:t>Цель шифра Шеннона</a:t>
             </a:r>
-            <a:endParaRPr lang="ru-RU" dirty="0"/>
           </a:p>
         </p:txBody>
       </p:sp>
@@ -19138,21 +18676,21 @@
               <a:lstStyle/>
               <a:p>
                 <a:r>
-                  <a:rPr lang="ru-RU" dirty="0" smtClean="0"/>
+                  <a:rPr lang="ru-RU" dirty="0"/>
                   <a:t>Цель шифра Шеннона – обеспечение </a:t>
                 </a:r>
                 <a:r>
-                  <a:rPr lang="ru-RU" b="1" dirty="0" smtClean="0"/>
+                  <a:rPr lang="ru-RU" b="1" dirty="0"/>
                   <a:t>секретности</a:t>
                 </a:r>
                 <a:r>
-                  <a:rPr lang="ru-RU" dirty="0" smtClean="0"/>
+                  <a:rPr lang="ru-RU" dirty="0"/>
                   <a:t> передаваемых сообщений по открытому каналу</a:t>
                 </a:r>
               </a:p>
               <a:p>
                 <a:r>
-                  <a:rPr lang="ru-RU" dirty="0" smtClean="0"/>
+                  <a:rPr lang="ru-RU" dirty="0"/>
                   <a:t>Для обеспечения секретности необходим общий секретный ключ </a:t>
                 </a:r>
                 <a14:m>
@@ -19178,18 +18716,9 @@
                   </m:oMath>
                 </a14:m>
                 <a:r>
-                  <a:rPr lang="ru-RU" dirty="0" smtClean="0"/>
-                  <a:t>, неизвестный для </a:t>
-                </a:r>
-                <a:r>
                   <a:rPr lang="ru-RU" dirty="0"/>
-                  <a:t>з</a:t>
-                </a:r>
-                <a:r>
-                  <a:rPr lang="ru-RU" dirty="0" smtClean="0"/>
-                  <a:t>лоумышленника</a:t>
-                </a:r>
-                <a:endParaRPr lang="ru-RU" dirty="0"/>
+                  <a:t>, неизвестный для злоумышленника</a:t>
+                </a:r>
               </a:p>
             </p:txBody>
           </p:sp>
@@ -19312,10 +18841,9 @@
             <a:lstStyle/>
             <a:p>
               <a:r>
-                <a:rPr lang="en-US" sz="3200" dirty="0" smtClean="0"/>
+                <a:rPr lang="en-US" sz="3200" dirty="0"/>
                 <a:t>Alice</a:t>
               </a:r>
-              <a:endParaRPr lang="en-US" sz="3200" dirty="0"/>
             </a:p>
           </p:txBody>
         </p:sp>
@@ -19381,7 +18909,7 @@
             <a:lstStyle/>
             <a:p>
               <a:r>
-                <a:rPr lang="en-US" sz="3200" dirty="0" smtClean="0"/>
+                <a:rPr lang="en-US" sz="3200" dirty="0"/>
                 <a:t>Bob</a:t>
               </a:r>
             </a:p>
@@ -19885,13 +19413,6 @@
   <p:clrMapOvr>
     <a:masterClrMapping/>
   </p:clrMapOvr>
-  <p:timing>
-    <p:tnLst>
-      <p:par>
-        <p:cTn id="1" dur="indefinite" restart="never" nodeType="tmRoot"/>
-      </p:par>
-    </p:tnLst>
-  </p:timing>
 </p:sld>
 </file>
 
